--- a/web/showcase/pptx/flagships/default/engine-deck.pptx
+++ b/web/showcase/pptx/flagships/default/engine-deck.pptx
@@ -3225,7 +3225,7 @@
               <a:defRPr/>
             </a:pPr>
             <a:r>
-              <a:rPr lang="en-US" sz="1600" b="true" i="false" u="none" strike="noStrike" kern="0">
+              <a:rPr lang="en-US" sz="1600" b="false" i="false" u="none" strike="noStrike" kern="0">
                 <a:solidFill>
                   <a:srgbClr val="7C5CFC"/>
                 </a:solidFill>
@@ -3262,7 +3262,7 @@
               <a:defRPr/>
             </a:pPr>
             <a:r>
-              <a:rPr lang="en-US" sz="1300" b="true" i="false" u="none" strike="noStrike" kern="0">
+              <a:rPr lang="en-US" sz="1300" b="false" i="false" u="none" strike="noStrike" kern="0">
                 <a:solidFill>
                   <a:srgbClr val="E6E8F2"/>
                 </a:solidFill>
@@ -3299,7 +3299,7 @@
               <a:defRPr/>
             </a:pPr>
             <a:r>
-              <a:rPr lang="en-US" sz="1300" b="true" i="false" u="none" strike="noStrike" kern="0">
+              <a:rPr lang="en-US" sz="1300" b="false" i="false" u="none" strike="noStrike" kern="0">
                 <a:solidFill>
                   <a:srgbClr val="E6E8F2"/>
                 </a:solidFill>
@@ -3336,7 +3336,7 @@
               <a:defRPr/>
             </a:pPr>
             <a:r>
-              <a:rPr lang="en-US" sz="1300" b="true" i="false" u="none" strike="noStrike" kern="0">
+              <a:rPr lang="en-US" sz="1300" b="false" i="false" u="none" strike="noStrike" kern="0">
                 <a:solidFill>
                   <a:srgbClr val="E6E8F2"/>
                 </a:solidFill>
@@ -3373,7 +3373,7 @@
               <a:defRPr/>
             </a:pPr>
             <a:r>
-              <a:rPr lang="en-US" sz="1300" b="true" i="false" u="none" strike="noStrike" kern="0">
+              <a:rPr lang="en-US" sz="1300" b="false" i="false" u="none" strike="noStrike" kern="0">
                 <a:solidFill>
                   <a:srgbClr val="E6E8F2"/>
                 </a:solidFill>
@@ -3410,7 +3410,7 @@
               <a:defRPr/>
             </a:pPr>
             <a:r>
-              <a:rPr lang="en-US" sz="1300" b="true" i="false" u="none" strike="noStrike" kern="0">
+              <a:rPr lang="en-US" sz="1300" b="false" i="false" u="none" strike="noStrike" kern="0">
                 <a:solidFill>
                   <a:srgbClr val="E6E8F2"/>
                 </a:solidFill>
@@ -3447,7 +3447,7 @@
               <a:defRPr/>
             </a:pPr>
             <a:r>
-              <a:rPr lang="en-US" sz="1300" b="true" i="false" u="none" strike="noStrike" kern="0">
+              <a:rPr lang="en-US" sz="1300" b="false" i="false" u="none" strike="noStrike" kern="0">
                 <a:solidFill>
                   <a:srgbClr val="E6E8F2"/>
                 </a:solidFill>
@@ -3484,7 +3484,7 @@
               <a:defRPr/>
             </a:pPr>
             <a:r>
-              <a:rPr lang="en-US" sz="1300" b="true" i="false" u="none" strike="noStrike" kern="0">
+              <a:rPr lang="en-US" sz="1300" b="false" i="false" u="none" strike="noStrike" kern="0">
                 <a:solidFill>
                   <a:srgbClr val="E6E8F2"/>
                 </a:solidFill>
@@ -3521,7 +3521,7 @@
               <a:defRPr/>
             </a:pPr>
             <a:r>
-              <a:rPr lang="en-US" sz="1300" b="true" i="false" u="none" strike="noStrike" kern="0">
+              <a:rPr lang="en-US" sz="1300" b="false" i="false" u="none" strike="noStrike" kern="0">
                 <a:solidFill>
                   <a:srgbClr val="E6E8F2"/>
                 </a:solidFill>
@@ -4485,7 +4485,7 @@
               <a:defRPr/>
             </a:pPr>
             <a:r>
-              <a:rPr lang="en-US" sz="2600" b="true" i="false" u="none" strike="noStrike" kern="0">
+              <a:rPr lang="en-US" sz="2600" b="false" i="false" u="none" strike="noStrike" kern="0">
                 <a:solidFill>
                   <a:srgbClr val="7C5CFC"/>
                 </a:solidFill>
@@ -4522,7 +4522,7 @@
               <a:defRPr/>
             </a:pPr>
             <a:r>
-              <a:rPr lang="en-US" sz="1600" b="true" i="false" u="none" strike="noStrike" kern="0">
+              <a:rPr lang="en-US" sz="1600" b="false" i="false" u="none" strike="noStrike" kern="0">
                 <a:solidFill>
                   <a:srgbClr val="7C5CFC"/>
                 </a:solidFill>
@@ -4559,7 +4559,7 @@
               <a:defRPr/>
             </a:pPr>
             <a:r>
-              <a:rPr lang="en-US" sz="1300" b="true" i="false" u="none" strike="noStrike" kern="0">
+              <a:rPr lang="en-US" sz="1300" b="false" i="false" u="none" strike="noStrike" kern="0">
                 <a:solidFill>
                   <a:srgbClr val="E6E8F2"/>
                 </a:solidFill>
@@ -4596,7 +4596,7 @@
               <a:defRPr/>
             </a:pPr>
             <a:r>
-              <a:rPr lang="en-US" sz="1300" b="true" i="false" u="none" strike="noStrike" kern="0">
+              <a:rPr lang="en-US" sz="1300" b="false" i="false" u="none" strike="noStrike" kern="0">
                 <a:solidFill>
                   <a:srgbClr val="E6E8F2"/>
                 </a:solidFill>
@@ -4633,7 +4633,7 @@
               <a:defRPr/>
             </a:pPr>
             <a:r>
-              <a:rPr lang="en-US" sz="1300" b="true" i="false" u="none" strike="noStrike" kern="0">
+              <a:rPr lang="en-US" sz="1300" b="false" i="false" u="none" strike="noStrike" kern="0">
                 <a:solidFill>
                   <a:srgbClr val="E6E8F2"/>
                 </a:solidFill>
@@ -4670,7 +4670,7 @@
               <a:defRPr/>
             </a:pPr>
             <a:r>
-              <a:rPr lang="en-US" sz="1300" b="true" i="false" u="none" strike="noStrike" kern="0">
+              <a:rPr lang="en-US" sz="1300" b="false" i="false" u="none" strike="noStrike" kern="0">
                 <a:solidFill>
                   <a:srgbClr val="E6E8F2"/>
                 </a:solidFill>
@@ -4945,7 +4945,7 @@
               <a:defRPr/>
             </a:pPr>
             <a:r>
-              <a:rPr lang="en-US" sz="850" b="true" i="false" u="none" strike="noStrike" kern="0">
+              <a:rPr lang="en-US" sz="850" b="false" i="false" u="none" strike="noStrike" kern="0">
                 <a:solidFill>
                   <a:srgbClr val="E6E8F2"/>
                 </a:solidFill>
@@ -5041,7 +5041,7 @@
               <a:defRPr/>
             </a:pPr>
             <a:r>
-              <a:rPr lang="en-US" sz="850" b="true" i="false" u="none" strike="noStrike" kern="0">
+              <a:rPr lang="en-US" sz="850" b="false" i="false" u="none" strike="noStrike" kern="0">
                 <a:solidFill>
                   <a:srgbClr val="E6E8F2"/>
                 </a:solidFill>
@@ -5309,7 +5309,7 @@
               <a:defRPr/>
             </a:pPr>
             <a:r>
-              <a:rPr lang="en-US" sz="850" b="true" i="false" u="none" strike="noStrike" kern="0">
+              <a:rPr lang="en-US" sz="850" b="false" i="false" u="none" strike="noStrike" kern="0">
                 <a:solidFill>
                   <a:srgbClr val="E6E8F2"/>
                 </a:solidFill>
@@ -5405,7 +5405,7 @@
               <a:defRPr/>
             </a:pPr>
             <a:r>
-              <a:rPr lang="en-US" sz="850" b="true" i="false" u="none" strike="noStrike" kern="0">
+              <a:rPr lang="en-US" sz="850" b="false" i="false" u="none" strike="noStrike" kern="0">
                 <a:solidFill>
                   <a:srgbClr val="E6E8F2"/>
                 </a:solidFill>
@@ -6070,7 +6070,7 @@
               <a:defRPr/>
             </a:pPr>
             <a:r>
-              <a:rPr lang="en-US" sz="850" b="true" i="false" u="none" strike="noStrike" kern="0">
+              <a:rPr lang="en-US" sz="850" b="false" i="false" u="none" strike="noStrike" kern="0">
                 <a:solidFill>
                   <a:srgbClr val="E6E8F2"/>
                 </a:solidFill>
@@ -6166,7 +6166,7 @@
               <a:defRPr/>
             </a:pPr>
             <a:r>
-              <a:rPr lang="en-US" sz="850" b="true" i="false" u="none" strike="noStrike" kern="0">
+              <a:rPr lang="en-US" sz="850" b="false" i="false" u="none" strike="noStrike" kern="0">
                 <a:solidFill>
                   <a:srgbClr val="E6E8F2"/>
                 </a:solidFill>
@@ -6212,7 +6212,7 @@
               <a:defRPr/>
             </a:pPr>
             <a:r>
-              <a:rPr lang="en-US" sz="2600" b="true" i="false" u="none" strike="noStrike" kern="0">
+              <a:rPr lang="en-US" sz="2600" b="false" i="false" u="none" strike="noStrike" kern="0">
                 <a:solidFill>
                   <a:srgbClr val="7C5CFC"/>
                 </a:solidFill>
@@ -6249,7 +6249,7 @@
               <a:defRPr/>
             </a:pPr>
             <a:r>
-              <a:rPr lang="en-US" sz="1600" b="true" i="false" u="none" strike="noStrike" kern="0">
+              <a:rPr lang="en-US" sz="1600" b="false" i="false" u="none" strike="noStrike" kern="0">
                 <a:solidFill>
                   <a:srgbClr val="7C5CFC"/>
                 </a:solidFill>
@@ -6286,7 +6286,7 @@
               <a:defRPr/>
             </a:pPr>
             <a:r>
-              <a:rPr lang="en-US" sz="1300" b="true" i="false" u="none" strike="noStrike" kern="0">
+              <a:rPr lang="en-US" sz="1300" b="false" i="false" u="none" strike="noStrike" kern="0">
                 <a:solidFill>
                   <a:srgbClr val="E6E8F2"/>
                 </a:solidFill>
@@ -6323,7 +6323,7 @@
               <a:defRPr/>
             </a:pPr>
             <a:r>
-              <a:rPr lang="en-US" sz="1300" b="true" i="false" u="none" strike="noStrike" kern="0">
+              <a:rPr lang="en-US" sz="1300" b="false" i="false" u="none" strike="noStrike" kern="0">
                 <a:solidFill>
                   <a:srgbClr val="E6E8F2"/>
                 </a:solidFill>
@@ -6360,7 +6360,7 @@
               <a:defRPr/>
             </a:pPr>
             <a:r>
-              <a:rPr lang="en-US" sz="1300" b="true" i="false" u="none" strike="noStrike" kern="0">
+              <a:rPr lang="en-US" sz="1300" b="false" i="false" u="none" strike="noStrike" kern="0">
                 <a:solidFill>
                   <a:srgbClr val="E6E8F2"/>
                 </a:solidFill>
@@ -6397,7 +6397,7 @@
               <a:defRPr/>
             </a:pPr>
             <a:r>
-              <a:rPr lang="en-US" sz="1300" b="true" i="false" u="none" strike="noStrike" kern="0">
+              <a:rPr lang="en-US" sz="1300" b="false" i="false" u="none" strike="noStrike" kern="0">
                 <a:solidFill>
                   <a:srgbClr val="E6E8F2"/>
                 </a:solidFill>
@@ -6850,7 +6850,7 @@
               <a:defRPr/>
             </a:pPr>
             <a:r>
-              <a:rPr lang="en-US" sz="950" b="true" i="false" u="none" strike="noStrike" kern="0">
+              <a:rPr lang="en-US" sz="950" b="false" i="false" u="none" strike="noStrike" kern="0">
                 <a:solidFill>
                   <a:srgbClr val="E6E8F2"/>
                 </a:solidFill>
@@ -6896,7 +6896,7 @@
               <a:defRPr/>
             </a:pPr>
             <a:r>
-              <a:rPr lang="en-US" sz="750" b="true" i="false" u="none" strike="noStrike" kern="0">
+              <a:rPr lang="en-US" sz="750" b="false" i="false" u="none" strike="noStrike" kern="0">
                 <a:solidFill>
                   <a:srgbClr val="2EC48A"/>
                 </a:solidFill>
@@ -7450,7 +7450,7 @@
               <a:defRPr/>
             </a:pPr>
             <a:r>
-              <a:rPr lang="en-US" sz="950" b="true" i="false" u="none" strike="noStrike" kern="0">
+              <a:rPr lang="en-US" sz="950" b="false" i="false" u="none" strike="noStrike" kern="0">
                 <a:solidFill>
                   <a:srgbClr val="E6E8F2"/>
                 </a:solidFill>
@@ -7496,7 +7496,7 @@
               <a:defRPr/>
             </a:pPr>
             <a:r>
-              <a:rPr lang="en-US" sz="750" b="true" i="false" u="none" strike="noStrike" kern="0">
+              <a:rPr lang="en-US" sz="750" b="false" i="false" u="none" strike="noStrike" kern="0">
                 <a:solidFill>
                   <a:srgbClr val="767E94"/>
                 </a:solidFill>
@@ -8131,7 +8131,7 @@
               <a:defRPr/>
             </a:pPr>
             <a:r>
-              <a:rPr lang="en-US" sz="950" b="true" i="false" u="none" strike="noStrike" kern="0">
+              <a:rPr lang="en-US" sz="950" b="false" i="false" u="none" strike="noStrike" kern="0">
                 <a:solidFill>
                   <a:srgbClr val="E6E8F2"/>
                 </a:solidFill>
@@ -8177,7 +8177,7 @@
               <a:defRPr/>
             </a:pPr>
             <a:r>
-              <a:rPr lang="en-US" sz="750" b="true" i="false" u="none" strike="noStrike" kern="0">
+              <a:rPr lang="en-US" sz="750" b="false" i="false" u="none" strike="noStrike" kern="0">
                 <a:solidFill>
                   <a:srgbClr val="767E94"/>
                 </a:solidFill>
@@ -8223,7 +8223,7 @@
               <a:defRPr/>
             </a:pPr>
             <a:r>
-              <a:rPr lang="en-US" sz="2600" b="true" i="false" u="none" strike="noStrike" kern="0">
+              <a:rPr lang="en-US" sz="2600" b="false" i="false" u="none" strike="noStrike" kern="0">
                 <a:solidFill>
                   <a:srgbClr val="7C5CFC"/>
                 </a:solidFill>
@@ -8260,7 +8260,7 @@
               <a:defRPr/>
             </a:pPr>
             <a:r>
-              <a:rPr lang="en-US" sz="1600" b="true" i="false" u="none" strike="noStrike" kern="0">
+              <a:rPr lang="en-US" sz="1600" b="false" i="false" u="none" strike="noStrike" kern="0">
                 <a:solidFill>
                   <a:srgbClr val="7C5CFC"/>
                 </a:solidFill>
@@ -8297,7 +8297,7 @@
               <a:defRPr/>
             </a:pPr>
             <a:r>
-              <a:rPr lang="en-US" sz="1300" b="true" i="false" u="none" strike="noStrike" kern="0">
+              <a:rPr lang="en-US" sz="1300" b="false" i="false" u="none" strike="noStrike" kern="0">
                 <a:solidFill>
                   <a:srgbClr val="E6E8F2"/>
                 </a:solidFill>
@@ -8334,7 +8334,7 @@
               <a:defRPr/>
             </a:pPr>
             <a:r>
-              <a:rPr lang="en-US" sz="1300" b="true" i="false" u="none" strike="noStrike" kern="0">
+              <a:rPr lang="en-US" sz="1300" b="false" i="false" u="none" strike="noStrike" kern="0">
                 <a:solidFill>
                   <a:srgbClr val="E6E8F2"/>
                 </a:solidFill>
@@ -8371,7 +8371,7 @@
               <a:defRPr/>
             </a:pPr>
             <a:r>
-              <a:rPr lang="en-US" sz="1300" b="true" i="false" u="none" strike="noStrike" kern="0">
+              <a:rPr lang="en-US" sz="1300" b="false" i="false" u="none" strike="noStrike" kern="0">
                 <a:solidFill>
                   <a:srgbClr val="E6E8F2"/>
                 </a:solidFill>
@@ -8408,7 +8408,7 @@
               <a:defRPr/>
             </a:pPr>
             <a:r>
-              <a:rPr lang="en-US" sz="1300" b="true" i="false" u="none" strike="noStrike" kern="0">
+              <a:rPr lang="en-US" sz="1300" b="false" i="false" u="none" strike="noStrike" kern="0">
                 <a:solidFill>
                   <a:srgbClr val="E6E8F2"/>
                 </a:solidFill>
@@ -8445,7 +8445,7 @@
               <a:defRPr/>
             </a:pPr>
             <a:r>
-              <a:rPr lang="en-US" sz="1300" b="true" i="false" u="none" strike="noStrike" kern="0">
+              <a:rPr lang="en-US" sz="1300" b="false" i="false" u="none" strike="noStrike" kern="0">
                 <a:solidFill>
                   <a:srgbClr val="E6E8F2"/>
                 </a:solidFill>
@@ -8482,7 +8482,7 @@
               <a:defRPr/>
             </a:pPr>
             <a:r>
-              <a:rPr lang="en-US" sz="1300" b="true" i="false" u="none" strike="noStrike" kern="0">
+              <a:rPr lang="en-US" sz="1300" b="false" i="false" u="none" strike="noStrike" kern="0">
                 <a:solidFill>
                   <a:srgbClr val="E6E8F2"/>
                 </a:solidFill>
@@ -8738,7 +8738,7 @@
               <a:defRPr/>
             </a:pPr>
             <a:r>
-              <a:rPr lang="en-US" sz="950" b="true" i="false" u="none" strike="noStrike" kern="0">
+              <a:rPr lang="en-US" sz="950" b="false" i="false" u="none" strike="noStrike" kern="0">
                 <a:solidFill>
                   <a:srgbClr val="E6E8F2"/>
                 </a:solidFill>
@@ -8834,7 +8834,7 @@
               <a:defRPr/>
             </a:pPr>
             <a:r>
-              <a:rPr lang="en-US" sz="950" b="true" i="false" u="none" strike="noStrike" kern="0">
+              <a:rPr lang="en-US" sz="950" b="false" i="false" u="none" strike="noStrike" kern="0">
                 <a:solidFill>
                   <a:srgbClr val="E6E8F2"/>
                 </a:solidFill>
@@ -9228,7 +9228,7 @@
               <a:defRPr/>
             </a:pPr>
             <a:r>
-              <a:rPr lang="en-US" sz="950" b="true" i="false" u="none" strike="noStrike" kern="0">
+              <a:rPr lang="en-US" sz="950" b="false" i="false" u="none" strike="noStrike" kern="0">
                 <a:solidFill>
                   <a:srgbClr val="E6E8F2"/>
                 </a:solidFill>
@@ -9324,7 +9324,7 @@
               <a:defRPr/>
             </a:pPr>
             <a:r>
-              <a:rPr lang="en-US" sz="950" b="true" i="false" u="none" strike="noStrike" kern="0">
+              <a:rPr lang="en-US" sz="950" b="false" i="false" u="none" strike="noStrike" kern="0">
                 <a:solidFill>
                   <a:srgbClr val="E6E8F2"/>
                 </a:solidFill>
@@ -9345,7 +9345,7 @@
         <p:spPr>
           <a:xfrm>
             <a:off x="203200" y="7189226"/>
-            <a:ext cx="2340978" cy="140335"/>
+            <a:ext cx="2250948" cy="140335"/>
           </a:xfrm>
           <a:prstGeom prst="rect">
             <a:avLst/>
@@ -9367,7 +9367,7 @@
                 </a:solidFill>
                 <a:latin typeface="Arial"/>
               </a:rPr>
-              <a:t>GraphCompose · v2.1.0-SNAPSHOT “navigable”</a:t>
+              <a:t>GraphCompose · v2.1.0-SNAPSHOT “twinned”</a:t>
             </a:r>
             <a:endParaRPr lang="en-US" sz="1100"/>
           </a:p>
@@ -9490,7 +9490,7 @@
               <a:defRPr/>
             </a:pPr>
             <a:r>
-              <a:rPr lang="en-US" sz="900" b="true" i="false" u="none" strike="noStrike" kern="0">
+              <a:rPr lang="en-US" sz="900" b="false" i="false" u="none" strike="noStrike" kern="0">
                 <a:solidFill>
                   <a:srgbClr val="6128D9"/>
                 </a:solidFill>
@@ -9536,7 +9536,7 @@
               <a:defRPr/>
             </a:pPr>
             <a:r>
-              <a:rPr lang="en-US" sz="1800" b="true" i="false" u="none" strike="noStrike" kern="0">
+              <a:rPr lang="en-US" sz="1800" b="false" i="false" u="none" strike="noStrike" kern="0">
                 <a:solidFill>
                   <a:srgbClr val="1C1E2E"/>
                 </a:solidFill>
@@ -10449,7 +10449,7 @@
               <a:defRPr/>
             </a:pPr>
             <a:r>
-              <a:rPr lang="en-US" sz="1600" b="true" i="false" u="none" strike="noStrike" kern="0">
+              <a:rPr lang="en-US" sz="1600" b="false" i="false" u="none" strike="noStrike" kern="0">
                 <a:solidFill>
                   <a:srgbClr val="7C5CFC"/>
                 </a:solidFill>
@@ -10519,7 +10519,7 @@
               <a:defRPr/>
             </a:pPr>
             <a:r>
-              <a:rPr lang="en-US" sz="950" b="true" i="false" u="none" strike="noStrike" kern="0">
+              <a:rPr lang="en-US" sz="950" b="false" i="false" u="none" strike="noStrike" kern="0">
                 <a:solidFill>
                   <a:srgbClr val="1C1E2E"/>
                 </a:solidFill>
@@ -10611,7 +10611,7 @@
               <a:defRPr/>
             </a:pPr>
             <a:r>
-              <a:rPr lang="en-US" sz="2000" b="true" i="false" u="none" strike="noStrike" kern="0">
+              <a:rPr lang="en-US" sz="2000" b="false" i="false" u="none" strike="noStrike" kern="0">
                 <a:solidFill>
                   <a:srgbClr val="7C5CFC"/>
                 </a:solidFill>
@@ -10702,7 +10702,7 @@
               <a:defRPr/>
             </a:pPr>
             <a:r>
-              <a:rPr lang="en-US" sz="1600" b="true" i="false" u="none" strike="noStrike" kern="0">
+              <a:rPr lang="en-US" sz="1600" b="false" i="false" u="none" strike="noStrike" kern="0">
                 <a:solidFill>
                   <a:srgbClr val="7C5CFC"/>
                 </a:solidFill>
@@ -10883,7 +10883,7 @@
               <a:defRPr/>
             </a:pPr>
             <a:r>
-              <a:rPr lang="en-US" sz="950" b="true" i="false" u="none" strike="noStrike" kern="0">
+              <a:rPr lang="en-US" sz="950" b="false" i="false" u="none" strike="noStrike" kern="0">
                 <a:solidFill>
                   <a:srgbClr val="1C1E2E"/>
                 </a:solidFill>
@@ -10975,7 +10975,7 @@
               <a:defRPr/>
             </a:pPr>
             <a:r>
-              <a:rPr lang="en-US" sz="2000" b="true" i="false" u="none" strike="noStrike" kern="0">
+              <a:rPr lang="en-US" sz="2000" b="false" i="false" u="none" strike="noStrike" kern="0">
                 <a:solidFill>
                   <a:srgbClr val="7C5CFC"/>
                 </a:solidFill>
@@ -11066,7 +11066,7 @@
               <a:defRPr/>
             </a:pPr>
             <a:r>
-              <a:rPr lang="en-US" sz="1600" b="true" i="false" u="none" strike="noStrike" kern="0">
+              <a:rPr lang="en-US" sz="1600" b="false" i="false" u="none" strike="noStrike" kern="0">
                 <a:solidFill>
                   <a:srgbClr val="7C5CFC"/>
                 </a:solidFill>
@@ -11136,7 +11136,7 @@
               <a:defRPr/>
             </a:pPr>
             <a:r>
-              <a:rPr lang="en-US" sz="950" b="true" i="false" u="none" strike="noStrike" kern="0">
+              <a:rPr lang="en-US" sz="950" b="false" i="false" u="none" strike="noStrike" kern="0">
                 <a:solidFill>
                   <a:srgbClr val="1C1E2E"/>
                 </a:solidFill>
@@ -11228,7 +11228,7 @@
               <a:defRPr/>
             </a:pPr>
             <a:r>
-              <a:rPr lang="en-US" sz="2000" b="true" i="false" u="none" strike="noStrike" kern="0">
+              <a:rPr lang="en-US" sz="2000" b="false" i="false" u="none" strike="noStrike" kern="0">
                 <a:solidFill>
                   <a:srgbClr val="7C5CFC"/>
                 </a:solidFill>
@@ -11319,7 +11319,7 @@
               <a:defRPr/>
             </a:pPr>
             <a:r>
-              <a:rPr lang="en-US" sz="1600" b="true" i="false" u="none" strike="noStrike" kern="0">
+              <a:rPr lang="en-US" sz="1600" b="false" i="false" u="none" strike="noStrike" kern="0">
                 <a:solidFill>
                   <a:srgbClr val="7C5CFC"/>
                 </a:solidFill>
@@ -11746,7 +11746,7 @@
               <a:defRPr/>
             </a:pPr>
             <a:r>
-              <a:rPr lang="en-US" sz="950" b="true" i="false" u="none" strike="noStrike" kern="0">
+              <a:rPr lang="en-US" sz="950" b="false" i="false" u="none" strike="noStrike" kern="0">
                 <a:solidFill>
                   <a:srgbClr val="1C1E2E"/>
                 </a:solidFill>
@@ -11883,7 +11883,7 @@
               <a:defRPr/>
             </a:pPr>
             <a:r>
-              <a:rPr lang="en-US" sz="1100" b="true" i="false" u="none" strike="noStrike" kern="0">
+              <a:rPr lang="en-US" sz="1100" b="false" i="false" u="none" strike="noStrike" kern="0">
                 <a:solidFill>
                   <a:srgbClr val="1C1E2E"/>
                 </a:solidFill>
@@ -12066,7 +12066,7 @@
               <a:defRPr/>
             </a:pPr>
             <a:r>
-              <a:rPr lang="en-US" sz="1100" b="true" i="false" u="none" strike="noStrike" kern="0">
+              <a:rPr lang="en-US" sz="1100" b="false" i="false" u="none" strike="noStrike" kern="0">
                 <a:solidFill>
                   <a:srgbClr val="1C1E2E"/>
                 </a:solidFill>
@@ -12295,7 +12295,7 @@
               <a:defRPr/>
             </a:pPr>
             <a:r>
-              <a:rPr lang="en-US" sz="1100" b="true" i="false" u="none" strike="noStrike" kern="0">
+              <a:rPr lang="en-US" sz="1100" b="false" i="false" u="none" strike="noStrike" kern="0">
                 <a:solidFill>
                   <a:srgbClr val="1C1E2E"/>
                 </a:solidFill>
@@ -12454,7 +12454,7 @@
         <p:spPr>
           <a:xfrm>
             <a:off x="203200" y="7189226"/>
-            <a:ext cx="2340978" cy="140335"/>
+            <a:ext cx="2250948" cy="140335"/>
           </a:xfrm>
           <a:prstGeom prst="rect">
             <a:avLst/>
@@ -12476,7 +12476,7 @@
                 </a:solidFill>
                 <a:latin typeface="Arial"/>
               </a:rPr>
-              <a:t>GraphCompose · v2.1.0-SNAPSHOT “navigable”</a:t>
+              <a:t>GraphCompose · v2.1.0-SNAPSHOT “twinned”</a:t>
             </a:r>
             <a:endParaRPr lang="en-US" sz="1100"/>
           </a:p>
@@ -12599,7 +12599,7 @@
               <a:defRPr/>
             </a:pPr>
             <a:r>
-              <a:rPr lang="en-US" sz="900" b="true" i="false" u="none" strike="noStrike" kern="0">
+              <a:rPr lang="en-US" sz="900" b="false" i="false" u="none" strike="noStrike" kern="0">
                 <a:solidFill>
                   <a:srgbClr val="6128D9"/>
                 </a:solidFill>
@@ -12645,7 +12645,7 @@
               <a:defRPr/>
             </a:pPr>
             <a:r>
-              <a:rPr lang="en-US" sz="1800" b="true" i="false" u="none" strike="noStrike" kern="0">
+              <a:rPr lang="en-US" sz="1800" b="false" i="false" u="none" strike="noStrike" kern="0">
                 <a:solidFill>
                   <a:srgbClr val="1C1E2E"/>
                 </a:solidFill>
@@ -13298,7 +13298,7 @@
               <a:defRPr/>
             </a:pPr>
             <a:r>
-              <a:rPr lang="en-US" sz="900" b="true" i="false" u="none" strike="noStrike" kern="0">
+              <a:rPr lang="en-US" sz="900" b="false" i="false" u="none" strike="noStrike" kern="0">
                 <a:solidFill>
                   <a:srgbClr val="FFFFFF"/>
                 </a:solidFill>
@@ -13398,7 +13398,7 @@
               <a:defRPr/>
             </a:pPr>
             <a:r>
-              <a:rPr lang="en-US" sz="900" b="true" i="false" u="none" strike="noStrike" kern="0">
+              <a:rPr lang="en-US" sz="900" b="false" i="false" u="none" strike="noStrike" kern="0">
                 <a:solidFill>
                   <a:srgbClr val="FFFFFF"/>
                 </a:solidFill>
@@ -13498,7 +13498,7 @@
               <a:defRPr/>
             </a:pPr>
             <a:r>
-              <a:rPr lang="en-US" sz="900" b="true" i="false" u="none" strike="noStrike" kern="0">
+              <a:rPr lang="en-US" sz="900" b="false" i="false" u="none" strike="noStrike" kern="0">
                 <a:solidFill>
                   <a:srgbClr val="FFFFFF"/>
                 </a:solidFill>
@@ -13598,7 +13598,7 @@
               <a:defRPr/>
             </a:pPr>
             <a:r>
-              <a:rPr lang="en-US" sz="900" b="true" i="false" u="none" strike="noStrike" kern="0">
+              <a:rPr lang="en-US" sz="900" b="false" i="false" u="none" strike="noStrike" kern="0">
                 <a:solidFill>
                   <a:srgbClr val="FFFFFF"/>
                 </a:solidFill>
@@ -15037,7 +15037,7 @@
               <a:defRPr/>
             </a:pPr>
             <a:r>
-              <a:rPr lang="en-US" sz="1100" b="true" i="false" u="none" strike="noStrike" kern="0">
+              <a:rPr lang="en-US" sz="1100" b="false" i="false" u="none" strike="noStrike" kern="0">
                 <a:solidFill>
                   <a:srgbClr val="1C1E2E"/>
                 </a:solidFill>
@@ -15862,7 +15862,7 @@
               <a:defRPr/>
             </a:pPr>
             <a:r>
-              <a:rPr lang="en-US" sz="1100" b="true" i="false" u="none" strike="noStrike" kern="0">
+              <a:rPr lang="en-US" sz="1100" b="false" i="false" u="none" strike="noStrike" kern="0">
                 <a:solidFill>
                   <a:srgbClr val="1C1E2E"/>
                 </a:solidFill>
@@ -16730,7 +16730,7 @@
         <p:spPr>
           <a:xfrm>
             <a:off x="203200" y="7189226"/>
-            <a:ext cx="2340978" cy="140335"/>
+            <a:ext cx="2250948" cy="140335"/>
           </a:xfrm>
           <a:prstGeom prst="rect">
             <a:avLst/>
@@ -16752,7 +16752,7 @@
                 </a:solidFill>
                 <a:latin typeface="Arial"/>
               </a:rPr>
-              <a:t>GraphCompose · v2.1.0-SNAPSHOT “navigable”</a:t>
+              <a:t>GraphCompose · v2.1.0-SNAPSHOT “twinned”</a:t>
             </a:r>
             <a:endParaRPr lang="en-US" sz="1100"/>
           </a:p>
@@ -16875,7 +16875,7 @@
               <a:defRPr/>
             </a:pPr>
             <a:r>
-              <a:rPr lang="en-US" sz="900" b="true" i="false" u="none" strike="noStrike" kern="0">
+              <a:rPr lang="en-US" sz="900" b="false" i="false" u="none" strike="noStrike" kern="0">
                 <a:solidFill>
                   <a:srgbClr val="6128D9"/>
                 </a:solidFill>
@@ -16921,7 +16921,7 @@
               <a:defRPr/>
             </a:pPr>
             <a:r>
-              <a:rPr lang="en-US" sz="1800" b="true" i="false" u="none" strike="noStrike" kern="0">
+              <a:rPr lang="en-US" sz="1800" b="false" i="false" u="none" strike="noStrike" kern="0">
                 <a:solidFill>
                   <a:srgbClr val="1C1E2E"/>
                 </a:solidFill>
@@ -17104,7 +17104,7 @@
               <a:defRPr/>
             </a:pPr>
             <a:r>
-              <a:rPr lang="en-US" sz="1100" b="true" i="false" u="none" strike="noStrike" kern="0">
+              <a:rPr lang="en-US" sz="1100" b="false" i="false" u="none" strike="noStrike" kern="0">
                 <a:solidFill>
                   <a:srgbClr val="1C1E2E"/>
                 </a:solidFill>
@@ -18153,7 +18153,7 @@
               <a:defRPr/>
             </a:pPr>
             <a:r>
-              <a:rPr lang="en-US" sz="1100" b="true" i="false" u="none" strike="noStrike" kern="0">
+              <a:rPr lang="en-US" sz="1100" b="false" i="false" u="none" strike="noStrike" kern="0">
                 <a:solidFill>
                   <a:srgbClr val="1C1E2E"/>
                 </a:solidFill>
@@ -19218,7 +19218,7 @@
               <a:defRPr/>
             </a:pPr>
             <a:r>
-              <a:rPr lang="en-US" sz="1100" b="true" i="false" u="none" strike="noStrike" kern="0">
+              <a:rPr lang="en-US" sz="1100" b="false" i="false" u="none" strike="noStrike" kern="0">
                 <a:solidFill>
                   <a:srgbClr val="1C1E2E"/>
                 </a:solidFill>
@@ -20305,7 +20305,7 @@
               <a:defRPr/>
             </a:pPr>
             <a:r>
-              <a:rPr lang="en-US" sz="1300" b="true" i="false" u="none" strike="noStrike" kern="0">
+              <a:rPr lang="en-US" sz="1300" b="false" i="false" u="none" strike="noStrike" kern="0">
                 <a:solidFill>
                   <a:srgbClr val="2D2D2D"/>
                 </a:solidFill>
@@ -20606,7 +20606,7 @@
               <a:defRPr/>
             </a:pPr>
             <a:r>
-              <a:rPr lang="en-US" sz="1100" b="true" i="false" u="none" strike="noStrike" kern="0">
+              <a:rPr lang="en-US" sz="1100" b="false" i="false" u="none" strike="noStrike" kern="0">
                 <a:solidFill>
                   <a:srgbClr val="1C1E2E"/>
                 </a:solidFill>
@@ -21361,7 +21361,7 @@
         <p:spPr>
           <a:xfrm>
             <a:off x="203200" y="7189226"/>
-            <a:ext cx="2340978" cy="140335"/>
+            <a:ext cx="2250948" cy="140335"/>
           </a:xfrm>
           <a:prstGeom prst="rect">
             <a:avLst/>
@@ -21383,7 +21383,7 @@
                 </a:solidFill>
                 <a:latin typeface="Arial"/>
               </a:rPr>
-              <a:t>GraphCompose · v2.1.0-SNAPSHOT “navigable”</a:t>
+              <a:t>GraphCompose · v2.1.0-SNAPSHOT “twinned”</a:t>
             </a:r>
             <a:endParaRPr lang="en-US" sz="1100"/>
           </a:p>

--- a/web/showcase/pptx/flagships/default/engine-deck.pptx
+++ b/web/showcase/pptx/flagships/default/engine-deck.pptx
@@ -9345,7 +9345,7 @@
         <p:spPr>
           <a:xfrm>
             <a:off x="203200" y="7189226"/>
-            <a:ext cx="2250948" cy="140335"/>
+            <a:ext cx="1621168" cy="140335"/>
           </a:xfrm>
           <a:prstGeom prst="rect">
             <a:avLst/>
@@ -9367,7 +9367,7 @@
                 </a:solidFill>
                 <a:latin typeface="Arial"/>
               </a:rPr>
-              <a:t>GraphCompose · v2.1.0-SNAPSHOT “twinned”</a:t>
+              <a:t>GraphCompose · v2.1.1 “twinned”</a:t>
             </a:r>
             <a:endParaRPr lang="en-US" sz="1100"/>
           </a:p>
@@ -12454,7 +12454,7 @@
         <p:spPr>
           <a:xfrm>
             <a:off x="203200" y="7189226"/>
-            <a:ext cx="2250948" cy="140335"/>
+            <a:ext cx="1621168" cy="140335"/>
           </a:xfrm>
           <a:prstGeom prst="rect">
             <a:avLst/>
@@ -12476,7 +12476,7 @@
                 </a:solidFill>
                 <a:latin typeface="Arial"/>
               </a:rPr>
-              <a:t>GraphCompose · v2.1.0-SNAPSHOT “twinned”</a:t>
+              <a:t>GraphCompose · v2.1.1 “twinned”</a:t>
             </a:r>
             <a:endParaRPr lang="en-US" sz="1100"/>
           </a:p>
@@ -13783,7 +13783,7 @@
                 </a:solidFill>
                 <a:latin typeface="Arial"/>
               </a:rPr>
-              <a:t>2.3 ms · 0.2 MB</a:t>
+              <a:t>2.8 ms · 0.2 MB</a:t>
             </a:r>
             <a:endParaRPr lang="en-US" sz="1100"/>
           </a:p>
@@ -13862,7 +13862,7 @@
                 </a:solidFill>
                 <a:latin typeface="Arial"/>
               </a:rPr>
-              <a:t>2.5 ms · 0.2 MB</a:t>
+              <a:t>2.8 ms · 0.2 MB</a:t>
             </a:r>
             <a:endParaRPr lang="en-US" sz="1100"/>
           </a:p>
@@ -13941,7 +13941,7 @@
                 </a:solidFill>
                 <a:latin typeface="Arial"/>
               </a:rPr>
-              <a:t>4.6 ms · 0.2 MB</a:t>
+              <a:t>5.7 ms · 0.2 MB</a:t>
             </a:r>
             <a:endParaRPr lang="en-US" sz="1100"/>
           </a:p>
@@ -14120,7 +14120,7 @@
                 </a:solidFill>
                 <a:latin typeface="Arial"/>
               </a:rPr>
-              <a:t>4.5 ms · 0.8 MB</a:t>
+              <a:t>5.7 ms · 1.0 MB</a:t>
             </a:r>
             <a:endParaRPr lang="en-US" sz="1100"/>
           </a:p>
@@ -14199,7 +14199,7 @@
                 </a:solidFill>
                 <a:latin typeface="Arial"/>
               </a:rPr>
-              <a:t>12.9 ms · 3.0 MB</a:t>
+              <a:t>14.5 ms · 3.1 MB</a:t>
             </a:r>
             <a:endParaRPr lang="en-US" sz="1100"/>
           </a:p>
@@ -14278,7 +14278,7 @@
                 </a:solidFill>
                 <a:latin typeface="Arial"/>
               </a:rPr>
-              <a:t>9.1 ms · 2.5 MB</a:t>
+              <a:t>9.9 ms · 2.5 MB</a:t>
             </a:r>
             <a:endParaRPr lang="en-US" sz="1100"/>
           </a:p>
@@ -14457,7 +14457,7 @@
                 </a:solidFill>
                 <a:latin typeface="Arial"/>
               </a:rPr>
-              <a:t>11.8 ms · 3.2 MB</a:t>
+              <a:t>15.3 ms · 3.9 MB</a:t>
             </a:r>
             <a:endParaRPr lang="en-US" sz="1100"/>
           </a:p>
@@ -14536,7 +14536,7 @@
                 </a:solidFill>
                 <a:latin typeface="Arial"/>
               </a:rPr>
-              <a:t>50.3 ms · 13.4 MB</a:t>
+              <a:t>57.6 ms · 13.8 MB</a:t>
             </a:r>
             <a:endParaRPr lang="en-US" sz="1100"/>
           </a:p>
@@ -14615,7 +14615,7 @@
                 </a:solidFill>
                 <a:latin typeface="Arial"/>
               </a:rPr>
-              <a:t>16.5 ms · 10.7 MB</a:t>
+              <a:t>21.1 ms · 10.8 MB</a:t>
             </a:r>
             <a:endParaRPr lang="en-US" sz="1100"/>
           </a:p>
@@ -14794,7 +14794,7 @@
                 </a:solidFill>
                 <a:latin typeface="Arial"/>
               </a:rPr>
-              <a:t>45.3 ms · 15.7 MB</a:t>
+              <a:t>64.1 ms · 19.2 MB</a:t>
             </a:r>
             <a:endParaRPr lang="en-US" sz="1100"/>
           </a:p>
@@ -14873,7 +14873,7 @@
                 </a:solidFill>
                 <a:latin typeface="Arial"/>
               </a:rPr>
-              <a:t>243.7 ms · 66.0 MB</a:t>
+              <a:t>291.0 ms · 68.2 MB</a:t>
             </a:r>
             <a:endParaRPr lang="en-US" sz="1100"/>
           </a:p>
@@ -14952,7 +14952,7 @@
                 </a:solidFill>
                 <a:latin typeface="Arial"/>
               </a:rPr>
-              <a:t>48.5 ms · 52.0 MB</a:t>
+              <a:t>64.8 ms · 52.5 MB</a:t>
             </a:r>
             <a:endParaRPr lang="en-US" sz="1100"/>
           </a:p>
@@ -15325,12 +15325,12 @@
         </p:nvSpPr>
         <p:spPr>
           <a:xfrm>
-            <a:off x="1510894" y="5302221"/>
-            <a:ext cx="870372" cy="282381"/>
+            <a:off x="1510894" y="5184890"/>
+            <a:ext cx="870372" cy="399712"/>
           </a:xfrm>
           <a:prstGeom prst="roundRect">
             <a:avLst>
-              <a:gd name="adj" fmla="val 8995"/>
+              <a:gd name="adj" fmla="val 6355"/>
             </a:avLst>
           </a:prstGeom>
           <a:solidFill>
@@ -15349,7 +15349,7 @@
         </p:nvSpPr>
         <p:spPr>
           <a:xfrm>
-            <a:off x="1765384" y="5163814"/>
+            <a:off x="1765384" y="5046483"/>
             <a:ext cx="362661" cy="93980"/>
           </a:xfrm>
           <a:prstGeom prst="rect">
@@ -15381,7 +15381,7 @@
                 </a:solidFill>
                 <a:latin typeface="Arial"/>
               </a:rPr>
-              <a:t>45.3 ms</a:t>
+              <a:t>64.1 ms</a:t>
             </a:r>
             <a:endParaRPr lang="en-US" sz="1100"/>
           </a:p>
@@ -15395,8 +15395,8 @@
         </p:nvSpPr>
         <p:spPr>
           <a:xfrm>
-            <a:off x="2522954" y="4064722"/>
-            <a:ext cx="870372" cy="1519880"/>
+            <a:off x="2522954" y="3769242"/>
+            <a:ext cx="870372" cy="1815360"/>
           </a:xfrm>
           <a:prstGeom prst="roundRect">
             <a:avLst>
@@ -15419,7 +15419,7 @@
         </p:nvSpPr>
         <p:spPr>
           <a:xfrm>
-            <a:off x="2749200" y="3926315"/>
+            <a:off x="2749200" y="3630835"/>
             <a:ext cx="419151" cy="93980"/>
           </a:xfrm>
           <a:prstGeom prst="rect">
@@ -15451,7 +15451,7 @@
                 </a:solidFill>
                 <a:latin typeface="Arial"/>
               </a:rPr>
-              <a:t>243.7 ms</a:t>
+              <a:t>291.0 ms</a:t>
             </a:r>
             <a:endParaRPr lang="en-US" sz="1100"/>
           </a:p>
@@ -15465,12 +15465,12 @@
         </p:nvSpPr>
         <p:spPr>
           <a:xfrm>
-            <a:off x="3535015" y="5282260"/>
-            <a:ext cx="870372" cy="302342"/>
+            <a:off x="3535015" y="5180586"/>
+            <a:ext cx="870372" cy="404016"/>
           </a:xfrm>
           <a:prstGeom prst="roundRect">
             <a:avLst>
-              <a:gd name="adj" fmla="val 8401"/>
+              <a:gd name="adj" fmla="val 6287"/>
             </a:avLst>
           </a:prstGeom>
           <a:solidFill>
@@ -15489,7 +15489,7 @@
         </p:nvSpPr>
         <p:spPr>
           <a:xfrm>
-            <a:off x="3789505" y="5143853"/>
+            <a:off x="3789505" y="5042179"/>
             <a:ext cx="362661" cy="93980"/>
           </a:xfrm>
           <a:prstGeom prst="rect">
@@ -15521,7 +15521,7 @@
                 </a:solidFill>
                 <a:latin typeface="Arial"/>
               </a:rPr>
-              <a:t>48.5 ms</a:t>
+              <a:t>64.8 ms</a:t>
             </a:r>
             <a:endParaRPr lang="en-US" sz="1100"/>
           </a:p>
@@ -16217,12 +16217,12 @@
         </p:nvSpPr>
         <p:spPr>
           <a:xfrm>
-            <a:off x="6721968" y="5216655"/>
-            <a:ext cx="878530" cy="367947"/>
+            <a:off x="6721968" y="5136423"/>
+            <a:ext cx="878530" cy="448179"/>
           </a:xfrm>
           <a:prstGeom prst="roundRect">
             <a:avLst>
-              <a:gd name="adj" fmla="val 6903"/>
+              <a:gd name="adj" fmla="val 5667"/>
             </a:avLst>
           </a:prstGeom>
           <a:solidFill>
@@ -16241,7 +16241,7 @@
         </p:nvSpPr>
         <p:spPr>
           <a:xfrm>
-            <a:off x="6972054" y="5078248"/>
+            <a:off x="6972054" y="4998016"/>
             <a:ext cx="379628" cy="93980"/>
           </a:xfrm>
           <a:prstGeom prst="rect">
@@ -16273,7 +16273,7 @@
                 </a:solidFill>
                 <a:latin typeface="Arial"/>
               </a:rPr>
-              <a:t>15.7 MB</a:t>
+              <a:t>19.2 MB</a:t>
             </a:r>
             <a:endParaRPr lang="en-US" sz="1100"/>
           </a:p>
@@ -16287,8 +16287,8 @@
         </p:nvSpPr>
         <p:spPr>
           <a:xfrm>
-            <a:off x="7743514" y="4041939"/>
-            <a:ext cx="878530" cy="1542663"/>
+            <a:off x="7743514" y="3990244"/>
+            <a:ext cx="878530" cy="1594358"/>
           </a:xfrm>
           <a:prstGeom prst="roundRect">
             <a:avLst>
@@ -16311,7 +16311,7 @@
         </p:nvSpPr>
         <p:spPr>
           <a:xfrm>
-            <a:off x="7993600" y="3903532"/>
+            <a:off x="7993600" y="3851837"/>
             <a:ext cx="379628" cy="93980"/>
           </a:xfrm>
           <a:prstGeom prst="rect">
@@ -16343,7 +16343,7 @@
                 </a:solidFill>
                 <a:latin typeface="Arial"/>
               </a:rPr>
-              <a:t>66.0 MB</a:t>
+              <a:t>68.2 MB</a:t>
             </a:r>
             <a:endParaRPr lang="en-US" sz="1100"/>
           </a:p>
@@ -16357,8 +16357,8 @@
         </p:nvSpPr>
         <p:spPr>
           <a:xfrm>
-            <a:off x="8765060" y="4369418"/>
-            <a:ext cx="878530" cy="1215184"/>
+            <a:off x="8765060" y="4355851"/>
+            <a:ext cx="878530" cy="1228751"/>
           </a:xfrm>
           <a:prstGeom prst="roundRect">
             <a:avLst>
@@ -16381,7 +16381,7 @@
         </p:nvSpPr>
         <p:spPr>
           <a:xfrm>
-            <a:off x="9015146" y="4231011"/>
+            <a:off x="9015146" y="4217444"/>
             <a:ext cx="379628" cy="93980"/>
           </a:xfrm>
           <a:prstGeom prst="rect">
@@ -16413,7 +16413,7 @@
                 </a:solidFill>
                 <a:latin typeface="Arial"/>
               </a:rPr>
-              <a:t>52.0 MB</a:t>
+              <a:t>52.5 MB</a:t>
             </a:r>
             <a:endParaRPr lang="en-US" sz="1100"/>
           </a:p>
@@ -16715,7 +16715,7 @@
                 </a:solidFill>
                 <a:latin typeface="Arial"/>
               </a:rPr>
-              <a:t>Measured 2026-06-15 19:41:29 · 50 warmup / 100 measurement iterations, single machine — numbers vary by hardware and document. Reproduce: scripts/run-benchmarks.ps1 · see docs/operations/benchmarks.md.</a:t>
+              <a:t>Measured 2026-07-26 23:00:56 · 50 warmup / 100 measurement iterations, single machine — numbers vary by hardware and document. Reproduce: scripts/run-benchmarks.ps1 · see docs/operations/benchmarks.md.</a:t>
             </a:r>
             <a:endParaRPr lang="en-US" sz="1100"/>
           </a:p>
@@ -16730,7 +16730,7 @@
         <p:spPr>
           <a:xfrm>
             <a:off x="203200" y="7189226"/>
-            <a:ext cx="2250948" cy="140335"/>
+            <a:ext cx="1621168" cy="140335"/>
           </a:xfrm>
           <a:prstGeom prst="rect">
             <a:avLst/>
@@ -16752,7 +16752,7 @@
                 </a:solidFill>
                 <a:latin typeface="Arial"/>
               </a:rPr>
-              <a:t>GraphCompose · v2.1.0-SNAPSHOT “twinned”</a:t>
+              <a:t>GraphCompose · v2.1.1 “twinned”</a:t>
             </a:r>
             <a:endParaRPr lang="en-US" sz="1100"/>
           </a:p>
@@ -17392,8 +17392,8 @@
         </p:nvCxnSpPr>
         <p:spPr>
           <a:xfrm flipV="true">
-            <a:off x="1481889" y="3438176"/>
-            <a:ext cx="1433885" cy="37481"/>
+            <a:off x="1481889" y="3419980"/>
+            <a:ext cx="1433885" cy="49560"/>
           </a:xfrm>
           <a:prstGeom prst="line">
             <a:avLst/>
@@ -17413,8 +17413,8 @@
         </p:nvCxnSpPr>
         <p:spPr>
           <a:xfrm flipV="true">
-            <a:off x="2915773" y="3264406"/>
-            <a:ext cx="1433885" cy="173771"/>
+            <a:off x="2915773" y="3166893"/>
+            <a:ext cx="1433885" cy="253087"/>
           </a:xfrm>
           <a:prstGeom prst="line">
             <a:avLst/>
@@ -17434,8 +17434,8 @@
         </p:nvCxnSpPr>
         <p:spPr>
           <a:xfrm flipV="true">
-            <a:off x="1481889" y="3238122"/>
-            <a:ext cx="1433885" cy="194248"/>
+            <a:off x="1481889" y="3200641"/>
+            <a:ext cx="1433885" cy="223071"/>
           </a:xfrm>
           <a:prstGeom prst="line">
             <a:avLst/>
@@ -17455,8 +17455,8 @@
         </p:nvCxnSpPr>
         <p:spPr>
           <a:xfrm flipV="true">
-            <a:off x="2915773" y="2235934"/>
-            <a:ext cx="1433885" cy="1002189"/>
+            <a:off x="2915773" y="1990363"/>
+            <a:ext cx="1433885" cy="1210278"/>
           </a:xfrm>
           <a:prstGeom prst="line">
             <a:avLst/>
@@ -17476,8 +17476,8 @@
         </p:nvCxnSpPr>
         <p:spPr>
           <a:xfrm flipV="true">
-            <a:off x="1481889" y="3413811"/>
-            <a:ext cx="1433885" cy="37948"/>
+            <a:off x="1481889" y="3389550"/>
+            <a:ext cx="1433885" cy="58269"/>
           </a:xfrm>
           <a:prstGeom prst="line">
             <a:avLst/>
@@ -17497,8 +17497,8 @@
         </p:nvCxnSpPr>
         <p:spPr>
           <a:xfrm flipV="true">
-            <a:off x="2915773" y="3247817"/>
-            <a:ext cx="1433885" cy="165995"/>
+            <a:off x="2915773" y="3163316"/>
+            <a:ext cx="1433885" cy="226234"/>
           </a:xfrm>
           <a:prstGeom prst="line">
             <a:avLst/>
@@ -17518,7 +17518,7 @@
         </p:nvSpPr>
         <p:spPr>
           <a:xfrm>
-            <a:off x="1450139" y="3443907"/>
+            <a:off x="1450139" y="3437790"/>
             <a:ext cx="63500" cy="63500"/>
           </a:xfrm>
           <a:prstGeom prst="ellipse">
@@ -17542,7 +17542,7 @@
         </p:nvSpPr>
         <p:spPr>
           <a:xfrm>
-            <a:off x="2884023" y="3406426"/>
+            <a:off x="2884023" y="3388230"/>
             <a:ext cx="63500" cy="63500"/>
           </a:xfrm>
           <a:prstGeom prst="ellipse">
@@ -17566,7 +17566,7 @@
         </p:nvSpPr>
         <p:spPr>
           <a:xfrm>
-            <a:off x="4317908" y="3232656"/>
+            <a:off x="4317908" y="3135143"/>
             <a:ext cx="63500" cy="63500"/>
           </a:xfrm>
           <a:prstGeom prst="ellipse">
@@ -17590,7 +17590,7 @@
         </p:nvSpPr>
         <p:spPr>
           <a:xfrm>
-            <a:off x="1450139" y="3400620"/>
+            <a:off x="1450139" y="3391963"/>
             <a:ext cx="63500" cy="63500"/>
           </a:xfrm>
           <a:prstGeom prst="ellipse">
@@ -17614,7 +17614,7 @@
         </p:nvSpPr>
         <p:spPr>
           <a:xfrm>
-            <a:off x="2884023" y="3206372"/>
+            <a:off x="2884023" y="3168891"/>
             <a:ext cx="63500" cy="63500"/>
           </a:xfrm>
           <a:prstGeom prst="ellipse">
@@ -17638,7 +17638,7 @@
         </p:nvSpPr>
         <p:spPr>
           <a:xfrm>
-            <a:off x="4317908" y="2204184"/>
+            <a:off x="4317908" y="1958613"/>
             <a:ext cx="63500" cy="63500"/>
           </a:xfrm>
           <a:prstGeom prst="ellipse">
@@ -17662,7 +17662,7 @@
         </p:nvSpPr>
         <p:spPr>
           <a:xfrm>
-            <a:off x="1450139" y="3420009"/>
+            <a:off x="1450139" y="3416069"/>
             <a:ext cx="63500" cy="63500"/>
           </a:xfrm>
           <a:prstGeom prst="ellipse">
@@ -17686,7 +17686,7 @@
         </p:nvSpPr>
         <p:spPr>
           <a:xfrm>
-            <a:off x="2884023" y="3382061"/>
+            <a:off x="2884023" y="3357800"/>
             <a:ext cx="63500" cy="63500"/>
           </a:xfrm>
           <a:prstGeom prst="ellipse">
@@ -17710,7 +17710,7 @@
         </p:nvSpPr>
         <p:spPr>
           <a:xfrm>
-            <a:off x="4317908" y="3216067"/>
+            <a:off x="4317908" y="3131566"/>
             <a:ext cx="63500" cy="63500"/>
           </a:xfrm>
           <a:prstGeom prst="ellipse">
@@ -18508,8 +18508,8 @@
         </p:nvSpPr>
         <p:spPr>
           <a:xfrm>
-            <a:off x="6693353" y="3193293"/>
-            <a:ext cx="2894117" cy="305797"/>
+            <a:off x="6693353" y="3126613"/>
+            <a:ext cx="2894117" cy="372477"/>
           </a:xfrm>
           <a:custGeom>
             <a:avLst/>
@@ -18518,25 +18518,25 @@
             <a:cxnLst/>
             <a:rect r="r" b="b" t="t" l="l"/>
             <a:pathLst>
-              <a:path h="305797" w="2894117">
+              <a:path h="372477" w="2894117">
                 <a:moveTo>
-                  <a:pt x="0" y="289467"/>
+                  <a:pt x="0" y="353231"/>
                 </a:moveTo>
                 <a:cubicBezTo>
-                  <a:pt x="241177" y="281755"/>
-                  <a:pt x="964706" y="291443"/>
-                  <a:pt x="1447059" y="243199"/>
-                </a:cubicBezTo>
-                <a:cubicBezTo>
-                  <a:pt x="1929412" y="194954"/>
-                  <a:pt x="2652941" y="40533"/>
+                  <a:pt x="241177" y="343705"/>
+                  <a:pt x="964706" y="354948"/>
+                  <a:pt x="1447059" y="296076"/>
+                </a:cubicBezTo>
+                <a:cubicBezTo>
+                  <a:pt x="1929412" y="237204"/>
+                  <a:pt x="2652941" y="49346"/>
                   <a:pt x="2894118" y="0"/>
                 </a:cubicBezTo>
                 <a:lnTo>
-                  <a:pt x="2894118" y="305797"/>
-                </a:lnTo>
-                <a:lnTo>
-                  <a:pt x="0" y="305797"/>
+                  <a:pt x="2894118" y="372477"/>
+                </a:lnTo>
+                <a:lnTo>
+                  <a:pt x="0" y="372477"/>
                 </a:lnTo>
                 <a:close/>
               </a:path>
@@ -18561,8 +18561,8 @@
         </p:nvSpPr>
         <p:spPr>
           <a:xfrm>
-            <a:off x="6693353" y="2216999"/>
-            <a:ext cx="2894117" cy="1282091"/>
+            <a:off x="6693353" y="2174036"/>
+            <a:ext cx="2894117" cy="1325054"/>
           </a:xfrm>
           <a:custGeom>
             <a:avLst/>
@@ -18571,25 +18571,25 @@
             <a:cxnLst/>
             <a:rect r="r" b="b" t="t" l="l"/>
             <a:pathLst>
-              <a:path h="1282091" w="2894117">
+              <a:path h="1325054" w="2894117">
                 <a:moveTo>
-                  <a:pt x="0" y="1224547"/>
+                  <a:pt x="0" y="1265760"/>
                 </a:moveTo>
                 <a:cubicBezTo>
-                  <a:pt x="241177" y="1190818"/>
-                  <a:pt x="964706" y="1226264"/>
-                  <a:pt x="1447059" y="1022173"/>
-                </a:cubicBezTo>
-                <a:cubicBezTo>
-                  <a:pt x="1929412" y="818082"/>
-                  <a:pt x="2652941" y="170362"/>
+                  <a:pt x="241177" y="1230897"/>
+                  <a:pt x="964706" y="1267542"/>
+                  <a:pt x="1447059" y="1056582"/>
+                </a:cubicBezTo>
+                <a:cubicBezTo>
+                  <a:pt x="1929412" y="845622"/>
+                  <a:pt x="2652941" y="176097"/>
                   <a:pt x="2894118" y="0"/>
                 </a:cubicBezTo>
                 <a:lnTo>
-                  <a:pt x="2894118" y="1282091"/>
-                </a:lnTo>
-                <a:lnTo>
-                  <a:pt x="0" y="1282091"/>
+                  <a:pt x="2894118" y="1325054"/>
+                </a:lnTo>
+                <a:lnTo>
+                  <a:pt x="0" y="1325054"/>
                 </a:lnTo>
                 <a:close/>
               </a:path>
@@ -18614,8 +18614,8 @@
         </p:nvSpPr>
         <p:spPr>
           <a:xfrm>
-            <a:off x="6693353" y="2489164"/>
-            <a:ext cx="2894117" cy="1009926"/>
+            <a:off x="6693353" y="2477888"/>
+            <a:ext cx="2894117" cy="1021201"/>
           </a:xfrm>
           <a:custGeom>
             <a:avLst/>
@@ -18624,25 +18624,25 @@
             <a:cxnLst/>
             <a:rect r="r" b="b" t="t" l="l"/>
             <a:pathLst>
-              <a:path h="1009926" w="2894117">
+              <a:path h="1021201" w="2894117">
                 <a:moveTo>
-                  <a:pt x="0" y="960936"/>
+                  <a:pt x="0" y="972017"/>
                 </a:moveTo>
                 <a:cubicBezTo>
-                  <a:pt x="241177" y="934432"/>
-                  <a:pt x="964706" y="962070"/>
-                  <a:pt x="1447059" y="801914"/>
-                </a:cubicBezTo>
-                <a:cubicBezTo>
-                  <a:pt x="1929412" y="641758"/>
-                  <a:pt x="2652941" y="133652"/>
+                  <a:pt x="241177" y="945190"/>
+                  <a:pt x="964706" y="973054"/>
+                  <a:pt x="1447059" y="811051"/>
+                </a:cubicBezTo>
+                <a:cubicBezTo>
+                  <a:pt x="1929412" y="649049"/>
+                  <a:pt x="2652941" y="135175"/>
                   <a:pt x="2894118" y="0"/>
                 </a:cubicBezTo>
                 <a:lnTo>
-                  <a:pt x="2894118" y="1009926"/>
-                </a:lnTo>
-                <a:lnTo>
-                  <a:pt x="0" y="1009926"/>
+                  <a:pt x="2894118" y="1021202"/>
+                </a:lnTo>
+                <a:lnTo>
+                  <a:pt x="0" y="1021202"/>
                 </a:lnTo>
                 <a:close/>
               </a:path>
@@ -18667,8 +18667,8 @@
         </p:nvSpPr>
         <p:spPr>
           <a:xfrm>
-            <a:off x="6693353" y="3193293"/>
-            <a:ext cx="2894117" cy="289467"/>
+            <a:off x="6693353" y="3126613"/>
+            <a:ext cx="2894117" cy="353231"/>
           </a:xfrm>
           <a:custGeom>
             <a:avLst/>
@@ -18677,18 +18677,18 @@
             <a:cxnLst/>
             <a:rect r="r" b="b" t="t" l="l"/>
             <a:pathLst>
-              <a:path h="289467" w="2894117">
+              <a:path h="353231" w="2894117">
                 <a:moveTo>
-                  <a:pt x="0" y="289467"/>
+                  <a:pt x="0" y="353231"/>
                 </a:moveTo>
                 <a:cubicBezTo>
-                  <a:pt x="241177" y="281755"/>
-                  <a:pt x="964706" y="291443"/>
-                  <a:pt x="1447059" y="243199"/>
-                </a:cubicBezTo>
-                <a:cubicBezTo>
-                  <a:pt x="1929412" y="194954"/>
-                  <a:pt x="2652941" y="40533"/>
+                  <a:pt x="241177" y="343705"/>
+                  <a:pt x="964706" y="354948"/>
+                  <a:pt x="1447059" y="296076"/>
+                </a:cubicBezTo>
+                <a:cubicBezTo>
+                  <a:pt x="1929412" y="237204"/>
+                  <a:pt x="2652941" y="49346"/>
                   <a:pt x="2894118" y="0"/>
                 </a:cubicBezTo>
               </a:path>
@@ -18711,8 +18711,8 @@
         </p:nvSpPr>
         <p:spPr>
           <a:xfrm>
-            <a:off x="6693353" y="2216999"/>
-            <a:ext cx="2894117" cy="1224547"/>
+            <a:off x="6693353" y="2174036"/>
+            <a:ext cx="2894117" cy="1265761"/>
           </a:xfrm>
           <a:custGeom>
             <a:avLst/>
@@ -18721,18 +18721,18 @@
             <a:cxnLst/>
             <a:rect r="r" b="b" t="t" l="l"/>
             <a:pathLst>
-              <a:path h="1224547" w="2894117">
+              <a:path h="1265761" w="2894117">
                 <a:moveTo>
-                  <a:pt x="0" y="1224547"/>
+                  <a:pt x="0" y="1265760"/>
                 </a:moveTo>
                 <a:cubicBezTo>
-                  <a:pt x="241177" y="1190818"/>
-                  <a:pt x="964706" y="1226264"/>
-                  <a:pt x="1447059" y="1022173"/>
-                </a:cubicBezTo>
-                <a:cubicBezTo>
-                  <a:pt x="1929412" y="818082"/>
-                  <a:pt x="2652941" y="170362"/>
+                  <a:pt x="241177" y="1230897"/>
+                  <a:pt x="964706" y="1267542"/>
+                  <a:pt x="1447059" y="1056582"/>
+                </a:cubicBezTo>
+                <a:cubicBezTo>
+                  <a:pt x="1929412" y="845622"/>
+                  <a:pt x="2652941" y="176097"/>
                   <a:pt x="2894118" y="0"/>
                 </a:cubicBezTo>
               </a:path>
@@ -18755,8 +18755,8 @@
         </p:nvSpPr>
         <p:spPr>
           <a:xfrm>
-            <a:off x="6693353" y="2489164"/>
-            <a:ext cx="2894117" cy="960936"/>
+            <a:off x="6693353" y="2477888"/>
+            <a:ext cx="2894117" cy="972017"/>
           </a:xfrm>
           <a:custGeom>
             <a:avLst/>
@@ -18765,18 +18765,18 @@
             <a:cxnLst/>
             <a:rect r="r" b="b" t="t" l="l"/>
             <a:pathLst>
-              <a:path h="960936" w="2894117">
+              <a:path h="972017" w="2894117">
                 <a:moveTo>
-                  <a:pt x="0" y="960936"/>
+                  <a:pt x="0" y="972017"/>
                 </a:moveTo>
                 <a:cubicBezTo>
-                  <a:pt x="241177" y="934432"/>
-                  <a:pt x="964706" y="962070"/>
-                  <a:pt x="1447059" y="801914"/>
-                </a:cubicBezTo>
-                <a:cubicBezTo>
-                  <a:pt x="1929412" y="641758"/>
-                  <a:pt x="2652941" y="133652"/>
+                  <a:pt x="241177" y="945190"/>
+                  <a:pt x="964706" y="973054"/>
+                  <a:pt x="1447059" y="811051"/>
+                </a:cubicBezTo>
+                <a:cubicBezTo>
+                  <a:pt x="1929412" y="649049"/>
+                  <a:pt x="2652941" y="135175"/>
                   <a:pt x="2894118" y="0"/>
                 </a:cubicBezTo>
               </a:path>
@@ -19239,7 +19239,7 @@
         <p:spPr>
           <a:xfrm>
             <a:off x="2731305" y="4722212"/>
-            <a:ext cx="482578" cy="418625"/>
+            <a:ext cx="546251" cy="455362"/>
           </a:xfrm>
           <a:custGeom>
             <a:avLst/>
@@ -19248,93 +19248,105 @@
             <a:cxnLst/>
             <a:rect r="r" b="b" t="t" l="l"/>
             <a:pathLst>
-              <a:path h="418625" w="482578">
+              <a:path h="455362" w="546251">
                 <a:moveTo>
                   <a:pt x="5435" y="0"/>
                 </a:moveTo>
                 <a:lnTo>
-                  <a:pt x="42717" y="1590"/>
-                </a:lnTo>
-                <a:lnTo>
-                  <a:pt x="79872" y="5054"/>
-                </a:lnTo>
-                <a:lnTo>
-                  <a:pt x="116806" y="10383"/>
-                </a:lnTo>
-                <a:lnTo>
-                  <a:pt x="153425" y="17564"/>
-                </a:lnTo>
-                <a:lnTo>
-                  <a:pt x="189636" y="26578"/>
-                </a:lnTo>
-                <a:lnTo>
-                  <a:pt x="225348" y="37402"/>
-                </a:lnTo>
-                <a:lnTo>
-                  <a:pt x="260470" y="50009"/>
-                </a:lnTo>
-                <a:lnTo>
-                  <a:pt x="294913" y="64368"/>
-                </a:lnTo>
-                <a:lnTo>
-                  <a:pt x="328590" y="80442"/>
-                </a:lnTo>
-                <a:lnTo>
-                  <a:pt x="361416" y="98189"/>
-                </a:lnTo>
-                <a:lnTo>
-                  <a:pt x="393307" y="117566"/>
-                </a:lnTo>
-                <a:lnTo>
-                  <a:pt x="424182" y="138523"/>
-                </a:lnTo>
-                <a:lnTo>
-                  <a:pt x="453965" y="161007"/>
-                </a:lnTo>
-                <a:lnTo>
-                  <a:pt x="482578" y="184961"/>
-                </a:lnTo>
-                <a:lnTo>
-                  <a:pt x="276743" y="418626"/>
-                </a:lnTo>
-                <a:lnTo>
-                  <a:pt x="260147" y="404733"/>
-                </a:lnTo>
-                <a:lnTo>
-                  <a:pt x="242874" y="391692"/>
-                </a:lnTo>
-                <a:lnTo>
-                  <a:pt x="224966" y="379537"/>
-                </a:lnTo>
-                <a:lnTo>
-                  <a:pt x="206469" y="368298"/>
-                </a:lnTo>
-                <a:lnTo>
-                  <a:pt x="187430" y="358005"/>
-                </a:lnTo>
-                <a:lnTo>
-                  <a:pt x="167897" y="348682"/>
-                </a:lnTo>
-                <a:lnTo>
-                  <a:pt x="147920" y="340354"/>
-                </a:lnTo>
-                <a:lnTo>
-                  <a:pt x="127550" y="333042"/>
-                </a:lnTo>
-                <a:lnTo>
-                  <a:pt x="106837" y="326764"/>
-                </a:lnTo>
-                <a:lnTo>
-                  <a:pt x="85834" y="321536"/>
-                </a:lnTo>
-                <a:lnTo>
-                  <a:pt x="64595" y="317371"/>
-                </a:lnTo>
-                <a:lnTo>
-                  <a:pt x="43174" y="314280"/>
-                </a:lnTo>
-                <a:lnTo>
-                  <a:pt x="21624" y="312271"/>
+                  <a:pt x="43666" y="1655"/>
+                </a:lnTo>
+                <a:lnTo>
+                  <a:pt x="81762" y="5281"/>
+                </a:lnTo>
+                <a:lnTo>
+                  <a:pt x="119619" y="10867"/>
+                </a:lnTo>
+                <a:lnTo>
+                  <a:pt x="157138" y="18399"/>
+                </a:lnTo>
+                <a:lnTo>
+                  <a:pt x="194219" y="27857"/>
+                </a:lnTo>
+                <a:lnTo>
+                  <a:pt x="230762" y="39216"/>
+                </a:lnTo>
+                <a:lnTo>
+                  <a:pt x="266670" y="52445"/>
+                </a:lnTo>
+                <a:lnTo>
+                  <a:pt x="301848" y="67509"/>
+                </a:lnTo>
+                <a:lnTo>
+                  <a:pt x="336201" y="84368"/>
+                </a:lnTo>
+                <a:lnTo>
+                  <a:pt x="369639" y="102977"/>
+                </a:lnTo>
+                <a:lnTo>
+                  <a:pt x="402073" y="123287"/>
+                </a:lnTo>
+                <a:lnTo>
+                  <a:pt x="433415" y="145243"/>
+                </a:lnTo>
+                <a:lnTo>
+                  <a:pt x="463582" y="168787"/>
+                </a:lnTo>
+                <a:lnTo>
+                  <a:pt x="492495" y="193856"/>
+                </a:lnTo>
+                <a:lnTo>
+                  <a:pt x="520076" y="220384"/>
+                </a:lnTo>
+                <a:lnTo>
+                  <a:pt x="546251" y="248299"/>
+                </a:lnTo>
+                <a:lnTo>
+                  <a:pt x="313673" y="455362"/>
+                </a:lnTo>
+                <a:lnTo>
+                  <a:pt x="298492" y="439171"/>
+                </a:lnTo>
+                <a:lnTo>
+                  <a:pt x="282495" y="423785"/>
+                </a:lnTo>
+                <a:lnTo>
+                  <a:pt x="265726" y="409245"/>
+                </a:lnTo>
+                <a:lnTo>
+                  <a:pt x="248228" y="395590"/>
+                </a:lnTo>
+                <a:lnTo>
+                  <a:pt x="230050" y="382855"/>
+                </a:lnTo>
+                <a:lnTo>
+                  <a:pt x="211239" y="371075"/>
+                </a:lnTo>
+                <a:lnTo>
+                  <a:pt x="191845" y="360282"/>
+                </a:lnTo>
+                <a:lnTo>
+                  <a:pt x="171919" y="350504"/>
+                </a:lnTo>
+                <a:lnTo>
+                  <a:pt x="151516" y="341767"/>
+                </a:lnTo>
+                <a:lnTo>
+                  <a:pt x="130690" y="334094"/>
+                </a:lnTo>
+                <a:lnTo>
+                  <a:pt x="109495" y="327506"/>
+                </a:lnTo>
+                <a:lnTo>
+                  <a:pt x="87988" y="322020"/>
+                </a:lnTo>
+                <a:lnTo>
+                  <a:pt x="66227" y="317652"/>
+                </a:lnTo>
+                <a:lnTo>
+                  <a:pt x="44270" y="314412"/>
+                </a:lnTo>
+                <a:lnTo>
+                  <a:pt x="22174" y="312309"/>
                 </a:lnTo>
                 <a:lnTo>
                   <a:pt x="0" y="311349"/>
@@ -19361,8 +19373,8 @@
         </p:nvSpPr>
         <p:spPr>
           <a:xfrm>
-            <a:off x="2256744" y="4924615"/>
-            <a:ext cx="1208359" cy="1280309"/>
+            <a:off x="2210838" y="4990137"/>
+            <a:ext cx="1254309" cy="1214668"/>
           </a:xfrm>
           <a:custGeom>
             <a:avLst/>
@@ -19371,366 +19383,360 @@
             <a:cxnLst/>
             <a:rect r="r" b="b" t="t" l="l"/>
             <a:pathLst>
-              <a:path h="1280309" w="1208359">
+              <a:path h="1214668" w="1254309">
                 <a:moveTo>
-                  <a:pt x="976257" y="0"/>
+                  <a:pt x="1083586" y="0"/>
                 </a:moveTo>
                 <a:lnTo>
-                  <a:pt x="1003561" y="27177"/>
-                </a:lnTo>
-                <a:lnTo>
-                  <a:pt x="1029418" y="55736"/>
-                </a:lnTo>
-                <a:lnTo>
-                  <a:pt x="1053756" y="85599"/>
-                </a:lnTo>
-                <a:lnTo>
-                  <a:pt x="1076510" y="116685"/>
-                </a:lnTo>
-                <a:lnTo>
-                  <a:pt x="1097618" y="148912"/>
-                </a:lnTo>
-                <a:lnTo>
-                  <a:pt x="1117024" y="182192"/>
-                </a:lnTo>
-                <a:lnTo>
-                  <a:pt x="1134676" y="216435"/>
-                </a:lnTo>
-                <a:lnTo>
-                  <a:pt x="1150524" y="251548"/>
-                </a:lnTo>
-                <a:lnTo>
-                  <a:pt x="1164528" y="287437"/>
-                </a:lnTo>
-                <a:lnTo>
-                  <a:pt x="1176648" y="324006"/>
-                </a:lnTo>
-                <a:lnTo>
-                  <a:pt x="1186853" y="361154"/>
-                </a:lnTo>
-                <a:lnTo>
-                  <a:pt x="1195114" y="398782"/>
-                </a:lnTo>
-                <a:lnTo>
-                  <a:pt x="1201409" y="436789"/>
-                </a:lnTo>
-                <a:lnTo>
-                  <a:pt x="1205722" y="475071"/>
-                </a:lnTo>
-                <a:lnTo>
-                  <a:pt x="1208040" y="513526"/>
-                </a:lnTo>
-                <a:lnTo>
-                  <a:pt x="1208358" y="552049"/>
-                </a:lnTo>
-                <a:lnTo>
-                  <a:pt x="1206675" y="590537"/>
-                </a:lnTo>
-                <a:lnTo>
-                  <a:pt x="1202994" y="628885"/>
-                </a:lnTo>
-                <a:lnTo>
-                  <a:pt x="1197327" y="666990"/>
-                </a:lnTo>
-                <a:lnTo>
-                  <a:pt x="1189688" y="704750"/>
-                </a:lnTo>
-                <a:lnTo>
-                  <a:pt x="1180098" y="742062"/>
-                </a:lnTo>
-                <a:lnTo>
-                  <a:pt x="1168582" y="778825"/>
-                </a:lnTo>
-                <a:lnTo>
-                  <a:pt x="1155173" y="814940"/>
-                </a:lnTo>
-                <a:lnTo>
-                  <a:pt x="1139906" y="850311"/>
-                </a:lnTo>
-                <a:lnTo>
-                  <a:pt x="1122822" y="884840"/>
-                </a:lnTo>
-                <a:lnTo>
-                  <a:pt x="1103968" y="918436"/>
-                </a:lnTo>
-                <a:lnTo>
-                  <a:pt x="1083394" y="951006"/>
-                </a:lnTo>
-                <a:lnTo>
-                  <a:pt x="1061156" y="982464"/>
-                </a:lnTo>
-                <a:lnTo>
-                  <a:pt x="1037315" y="1012725"/>
-                </a:lnTo>
-                <a:lnTo>
-                  <a:pt x="1011933" y="1041706"/>
-                </a:lnTo>
-                <a:lnTo>
-                  <a:pt x="985080" y="1069330"/>
-                </a:lnTo>
-                <a:lnTo>
-                  <a:pt x="956829" y="1095522"/>
-                </a:lnTo>
-                <a:lnTo>
-                  <a:pt x="927256" y="1120211"/>
-                </a:lnTo>
-                <a:lnTo>
-                  <a:pt x="896440" y="1143330"/>
-                </a:lnTo>
-                <a:lnTo>
-                  <a:pt x="864464" y="1164817"/>
-                </a:lnTo>
-                <a:lnTo>
-                  <a:pt x="831416" y="1184615"/>
-                </a:lnTo>
-                <a:lnTo>
-                  <a:pt x="797384" y="1202669"/>
-                </a:lnTo>
-                <a:lnTo>
-                  <a:pt x="762460" y="1218931"/>
-                </a:lnTo>
-                <a:lnTo>
-                  <a:pt x="726738" y="1233358"/>
-                </a:lnTo>
-                <a:lnTo>
-                  <a:pt x="690316" y="1245909"/>
-                </a:lnTo>
-                <a:lnTo>
-                  <a:pt x="653291" y="1256551"/>
-                </a:lnTo>
-                <a:lnTo>
-                  <a:pt x="615762" y="1265256"/>
-                </a:lnTo>
-                <a:lnTo>
-                  <a:pt x="577833" y="1272000"/>
-                </a:lnTo>
-                <a:lnTo>
-                  <a:pt x="539604" y="1276764"/>
-                </a:lnTo>
-                <a:lnTo>
-                  <a:pt x="501179" y="1279536"/>
-                </a:lnTo>
-                <a:lnTo>
-                  <a:pt x="462663" y="1280309"/>
-                </a:lnTo>
-                <a:lnTo>
-                  <a:pt x="424158" y="1279080"/>
-                </a:lnTo>
-                <a:lnTo>
-                  <a:pt x="385769" y="1275852"/>
-                </a:lnTo>
-                <a:lnTo>
-                  <a:pt x="347599" y="1270635"/>
-                </a:lnTo>
-                <a:lnTo>
-                  <a:pt x="309752" y="1263443"/>
-                </a:lnTo>
-                <a:lnTo>
-                  <a:pt x="272330" y="1254294"/>
-                </a:lnTo>
-                <a:lnTo>
-                  <a:pt x="235433" y="1243213"/>
-                </a:lnTo>
-                <a:lnTo>
-                  <a:pt x="199162" y="1230231"/>
-                </a:lnTo>
-                <a:lnTo>
-                  <a:pt x="163614" y="1215383"/>
-                </a:lnTo>
-                <a:lnTo>
-                  <a:pt x="128885" y="1198708"/>
-                </a:lnTo>
-                <a:lnTo>
-                  <a:pt x="95069" y="1180252"/>
-                </a:lnTo>
-                <a:lnTo>
-                  <a:pt x="62258" y="1160064"/>
-                </a:lnTo>
-                <a:lnTo>
-                  <a:pt x="30540" y="1138199"/>
-                </a:lnTo>
-                <a:lnTo>
-                  <a:pt x="0" y="1114716"/>
-                </a:lnTo>
-                <a:lnTo>
-                  <a:pt x="196163" y="872875"/>
-                </a:lnTo>
-                <a:lnTo>
-                  <a:pt x="213876" y="886495"/>
-                </a:lnTo>
-                <a:lnTo>
-                  <a:pt x="232273" y="899176"/>
-                </a:lnTo>
-                <a:lnTo>
-                  <a:pt x="251304" y="910885"/>
-                </a:lnTo>
-                <a:lnTo>
-                  <a:pt x="270917" y="921590"/>
-                </a:lnTo>
-                <a:lnTo>
-                  <a:pt x="291060" y="931261"/>
-                </a:lnTo>
-                <a:lnTo>
-                  <a:pt x="311677" y="939874"/>
-                </a:lnTo>
-                <a:lnTo>
-                  <a:pt x="332715" y="947403"/>
-                </a:lnTo>
-                <a:lnTo>
-                  <a:pt x="354115" y="953830"/>
-                </a:lnTo>
-                <a:lnTo>
-                  <a:pt x="375820" y="959136"/>
-                </a:lnTo>
-                <a:lnTo>
-                  <a:pt x="397771" y="963308"/>
-                </a:lnTo>
-                <a:lnTo>
-                  <a:pt x="419909" y="966334"/>
-                </a:lnTo>
-                <a:lnTo>
-                  <a:pt x="442175" y="968206"/>
-                </a:lnTo>
-                <a:lnTo>
-                  <a:pt x="464508" y="968919"/>
-                </a:lnTo>
-                <a:lnTo>
-                  <a:pt x="486848" y="968470"/>
-                </a:lnTo>
-                <a:lnTo>
-                  <a:pt x="509134" y="966863"/>
-                </a:lnTo>
-                <a:lnTo>
-                  <a:pt x="531307" y="964099"/>
-                </a:lnTo>
-                <a:lnTo>
-                  <a:pt x="553306" y="960188"/>
-                </a:lnTo>
-                <a:lnTo>
-                  <a:pt x="575072" y="955139"/>
-                </a:lnTo>
-                <a:lnTo>
-                  <a:pt x="596547" y="948966"/>
-                </a:lnTo>
-                <a:lnTo>
-                  <a:pt x="617672" y="941687"/>
-                </a:lnTo>
-                <a:lnTo>
-                  <a:pt x="638390" y="933320"/>
-                </a:lnTo>
-                <a:lnTo>
-                  <a:pt x="658646" y="923888"/>
-                </a:lnTo>
-                <a:lnTo>
-                  <a:pt x="678385" y="913416"/>
-                </a:lnTo>
-                <a:lnTo>
-                  <a:pt x="697553" y="901933"/>
-                </a:lnTo>
-                <a:lnTo>
-                  <a:pt x="716098" y="889471"/>
-                </a:lnTo>
-                <a:lnTo>
-                  <a:pt x="733972" y="876061"/>
-                </a:lnTo>
-                <a:lnTo>
-                  <a:pt x="751124" y="861742"/>
-                </a:lnTo>
-                <a:lnTo>
-                  <a:pt x="767510" y="846551"/>
-                </a:lnTo>
-                <a:lnTo>
-                  <a:pt x="783085" y="830529"/>
-                </a:lnTo>
-                <a:lnTo>
-                  <a:pt x="797806" y="813720"/>
-                </a:lnTo>
-                <a:lnTo>
-                  <a:pt x="811634" y="796169"/>
-                </a:lnTo>
-                <a:lnTo>
-                  <a:pt x="824532" y="777923"/>
-                </a:lnTo>
-                <a:lnTo>
-                  <a:pt x="836465" y="759032"/>
-                </a:lnTo>
-                <a:lnTo>
-                  <a:pt x="847400" y="739547"/>
-                </a:lnTo>
-                <a:lnTo>
-                  <a:pt x="857309" y="719520"/>
-                </a:lnTo>
-                <a:lnTo>
-                  <a:pt x="866164" y="699005"/>
-                </a:lnTo>
-                <a:lnTo>
-                  <a:pt x="873941" y="678058"/>
-                </a:lnTo>
-                <a:lnTo>
-                  <a:pt x="880620" y="656735"/>
-                </a:lnTo>
-                <a:lnTo>
-                  <a:pt x="886182" y="635094"/>
-                </a:lnTo>
-                <a:lnTo>
-                  <a:pt x="890613" y="613194"/>
-                </a:lnTo>
-                <a:lnTo>
-                  <a:pt x="893900" y="591093"/>
-                </a:lnTo>
-                <a:lnTo>
-                  <a:pt x="896035" y="568851"/>
-                </a:lnTo>
-                <a:lnTo>
-                  <a:pt x="897011" y="546528"/>
-                </a:lnTo>
-                <a:lnTo>
-                  <a:pt x="896827" y="524184"/>
-                </a:lnTo>
-                <a:lnTo>
-                  <a:pt x="895482" y="501881"/>
-                </a:lnTo>
-                <a:lnTo>
-                  <a:pt x="892981" y="479677"/>
-                </a:lnTo>
-                <a:lnTo>
-                  <a:pt x="889329" y="457633"/>
-                </a:lnTo>
-                <a:lnTo>
-                  <a:pt x="884538" y="435809"/>
-                </a:lnTo>
-                <a:lnTo>
-                  <a:pt x="878619" y="414263"/>
-                </a:lnTo>
-                <a:lnTo>
-                  <a:pt x="871590" y="393053"/>
-                </a:lnTo>
-                <a:lnTo>
-                  <a:pt x="863468" y="372237"/>
-                </a:lnTo>
-                <a:lnTo>
-                  <a:pt x="854275" y="351872"/>
-                </a:lnTo>
-                <a:lnTo>
-                  <a:pt x="844038" y="332011"/>
-                </a:lnTo>
-                <a:lnTo>
-                  <a:pt x="832782" y="312708"/>
-                </a:lnTo>
-                <a:lnTo>
-                  <a:pt x="820539" y="294017"/>
-                </a:lnTo>
-                <a:lnTo>
-                  <a:pt x="807342" y="275987"/>
-                </a:lnTo>
-                <a:lnTo>
-                  <a:pt x="793226" y="258666"/>
-                </a:lnTo>
-                <a:lnTo>
-                  <a:pt x="778229" y="242102"/>
-                </a:lnTo>
-                <a:lnTo>
-                  <a:pt x="762392" y="226339"/>
+                  <a:pt x="1107507" y="30416"/>
+                </a:lnTo>
+                <a:lnTo>
+                  <a:pt x="1129808" y="62038"/>
+                </a:lnTo>
+                <a:lnTo>
+                  <a:pt x="1150428" y="94781"/>
+                </a:lnTo>
+                <a:lnTo>
+                  <a:pt x="1169313" y="128555"/>
+                </a:lnTo>
+                <a:lnTo>
+                  <a:pt x="1186409" y="163268"/>
+                </a:lnTo>
+                <a:lnTo>
+                  <a:pt x="1201672" y="198826"/>
+                </a:lnTo>
+                <a:lnTo>
+                  <a:pt x="1215058" y="235131"/>
+                </a:lnTo>
+                <a:lnTo>
+                  <a:pt x="1226532" y="272086"/>
+                </a:lnTo>
+                <a:lnTo>
+                  <a:pt x="1236062" y="309589"/>
+                </a:lnTo>
+                <a:lnTo>
+                  <a:pt x="1243623" y="347538"/>
+                </a:lnTo>
+                <a:lnTo>
+                  <a:pt x="1249193" y="385830"/>
+                </a:lnTo>
+                <a:lnTo>
+                  <a:pt x="1252758" y="424361"/>
+                </a:lnTo>
+                <a:lnTo>
+                  <a:pt x="1254308" y="463024"/>
+                </a:lnTo>
+                <a:lnTo>
+                  <a:pt x="1253839" y="501717"/>
+                </a:lnTo>
+                <a:lnTo>
+                  <a:pt x="1251352" y="540331"/>
+                </a:lnTo>
+                <a:lnTo>
+                  <a:pt x="1246853" y="578764"/>
+                </a:lnTo>
+                <a:lnTo>
+                  <a:pt x="1240356" y="616910"/>
+                </a:lnTo>
+                <a:lnTo>
+                  <a:pt x="1231877" y="654664"/>
+                </a:lnTo>
+                <a:lnTo>
+                  <a:pt x="1221440" y="691925"/>
+                </a:lnTo>
+                <a:lnTo>
+                  <a:pt x="1209073" y="728590"/>
+                </a:lnTo>
+                <a:lnTo>
+                  <a:pt x="1194810" y="764561"/>
+                </a:lnTo>
+                <a:lnTo>
+                  <a:pt x="1178689" y="799738"/>
+                </a:lnTo>
+                <a:lnTo>
+                  <a:pt x="1160756" y="834026"/>
+                </a:lnTo>
+                <a:lnTo>
+                  <a:pt x="1141058" y="867332"/>
+                </a:lnTo>
+                <a:lnTo>
+                  <a:pt x="1119649" y="899565"/>
+                </a:lnTo>
+                <a:lnTo>
+                  <a:pt x="1096588" y="930637"/>
+                </a:lnTo>
+                <a:lnTo>
+                  <a:pt x="1071936" y="960464"/>
+                </a:lnTo>
+                <a:lnTo>
+                  <a:pt x="1045763" y="988964"/>
+                </a:lnTo>
+                <a:lnTo>
+                  <a:pt x="1018138" y="1016059"/>
+                </a:lnTo>
+                <a:lnTo>
+                  <a:pt x="989137" y="1041676"/>
+                </a:lnTo>
+                <a:lnTo>
+                  <a:pt x="958839" y="1065746"/>
+                </a:lnTo>
+                <a:lnTo>
+                  <a:pt x="927327" y="1088201"/>
+                </a:lnTo>
+                <a:lnTo>
+                  <a:pt x="894685" y="1108983"/>
+                </a:lnTo>
+                <a:lnTo>
+                  <a:pt x="861005" y="1128032"/>
+                </a:lnTo>
+                <a:lnTo>
+                  <a:pt x="826376" y="1145299"/>
+                </a:lnTo>
+                <a:lnTo>
+                  <a:pt x="790893" y="1160736"/>
+                </a:lnTo>
+                <a:lnTo>
+                  <a:pt x="754653" y="1174300"/>
+                </a:lnTo>
+                <a:lnTo>
+                  <a:pt x="717755" y="1185955"/>
+                </a:lnTo>
+                <a:lnTo>
+                  <a:pt x="680300" y="1195669"/>
+                </a:lnTo>
+                <a:lnTo>
+                  <a:pt x="642388" y="1203416"/>
+                </a:lnTo>
+                <a:lnTo>
+                  <a:pt x="604124" y="1209174"/>
+                </a:lnTo>
+                <a:lnTo>
+                  <a:pt x="565612" y="1212928"/>
+                </a:lnTo>
+                <a:lnTo>
+                  <a:pt x="526956" y="1214668"/>
+                </a:lnTo>
+                <a:lnTo>
+                  <a:pt x="488262" y="1214388"/>
+                </a:lnTo>
+                <a:lnTo>
+                  <a:pt x="449635" y="1212091"/>
+                </a:lnTo>
+                <a:lnTo>
+                  <a:pt x="411181" y="1207781"/>
+                </a:lnTo>
+                <a:lnTo>
+                  <a:pt x="373004" y="1201470"/>
+                </a:lnTo>
+                <a:lnTo>
+                  <a:pt x="335208" y="1193177"/>
+                </a:lnTo>
+                <a:lnTo>
+                  <a:pt x="297897" y="1182922"/>
+                </a:lnTo>
+                <a:lnTo>
+                  <a:pt x="261171" y="1170736"/>
+                </a:lnTo>
+                <a:lnTo>
+                  <a:pt x="225131" y="1156649"/>
+                </a:lnTo>
+                <a:lnTo>
+                  <a:pt x="189875" y="1140702"/>
+                </a:lnTo>
+                <a:lnTo>
+                  <a:pt x="155499" y="1122937"/>
+                </a:lnTo>
+                <a:lnTo>
+                  <a:pt x="122097" y="1103402"/>
+                </a:lnTo>
+                <a:lnTo>
+                  <a:pt x="89760" y="1082152"/>
+                </a:lnTo>
+                <a:lnTo>
+                  <a:pt x="58575" y="1059243"/>
+                </a:lnTo>
+                <a:lnTo>
+                  <a:pt x="28628" y="1034739"/>
+                </a:lnTo>
+                <a:lnTo>
+                  <a:pt x="0" y="1008705"/>
+                </a:lnTo>
+                <a:lnTo>
+                  <a:pt x="215444" y="783869"/>
+                </a:lnTo>
+                <a:lnTo>
+                  <a:pt x="232048" y="798969"/>
+                </a:lnTo>
+                <a:lnTo>
+                  <a:pt x="249417" y="813181"/>
+                </a:lnTo>
+                <a:lnTo>
+                  <a:pt x="267505" y="826468"/>
+                </a:lnTo>
+                <a:lnTo>
+                  <a:pt x="286260" y="838793"/>
+                </a:lnTo>
+                <a:lnTo>
+                  <a:pt x="305634" y="850123"/>
+                </a:lnTo>
+                <a:lnTo>
+                  <a:pt x="325572" y="860427"/>
+                </a:lnTo>
+                <a:lnTo>
+                  <a:pt x="346020" y="869677"/>
+                </a:lnTo>
+                <a:lnTo>
+                  <a:pt x="366923" y="877847"/>
+                </a:lnTo>
+                <a:lnTo>
+                  <a:pt x="388224" y="884915"/>
+                </a:lnTo>
+                <a:lnTo>
+                  <a:pt x="409865" y="890863"/>
+                </a:lnTo>
+                <a:lnTo>
+                  <a:pt x="431786" y="895673"/>
+                </a:lnTo>
+                <a:lnTo>
+                  <a:pt x="453929" y="899333"/>
+                </a:lnTo>
+                <a:lnTo>
+                  <a:pt x="476232" y="901833"/>
+                </a:lnTo>
+                <a:lnTo>
+                  <a:pt x="498636" y="903165"/>
+                </a:lnTo>
+                <a:lnTo>
+                  <a:pt x="521078" y="903328"/>
+                </a:lnTo>
+                <a:lnTo>
+                  <a:pt x="543499" y="902319"/>
+                </a:lnTo>
+                <a:lnTo>
+                  <a:pt x="565836" y="900141"/>
+                </a:lnTo>
+                <a:lnTo>
+                  <a:pt x="588029" y="896801"/>
+                </a:lnTo>
+                <a:lnTo>
+                  <a:pt x="610018" y="892308"/>
+                </a:lnTo>
+                <a:lnTo>
+                  <a:pt x="631742" y="886674"/>
+                </a:lnTo>
+                <a:lnTo>
+                  <a:pt x="653143" y="879914"/>
+                </a:lnTo>
+                <a:lnTo>
+                  <a:pt x="674162" y="872047"/>
+                </a:lnTo>
+                <a:lnTo>
+                  <a:pt x="694742" y="863094"/>
+                </a:lnTo>
+                <a:lnTo>
+                  <a:pt x="714827" y="853079"/>
+                </a:lnTo>
+                <a:lnTo>
+                  <a:pt x="734362" y="842030"/>
+                </a:lnTo>
+                <a:lnTo>
+                  <a:pt x="753293" y="829977"/>
+                </a:lnTo>
+                <a:lnTo>
+                  <a:pt x="771571" y="816953"/>
+                </a:lnTo>
+                <a:lnTo>
+                  <a:pt x="789143" y="802992"/>
+                </a:lnTo>
+                <a:lnTo>
+                  <a:pt x="805964" y="788134"/>
+                </a:lnTo>
+                <a:lnTo>
+                  <a:pt x="821986" y="772419"/>
+                </a:lnTo>
+                <a:lnTo>
+                  <a:pt x="837167" y="755889"/>
+                </a:lnTo>
+                <a:lnTo>
+                  <a:pt x="851465" y="738590"/>
+                </a:lnTo>
+                <a:lnTo>
+                  <a:pt x="864840" y="720568"/>
+                </a:lnTo>
+                <a:lnTo>
+                  <a:pt x="877258" y="701873"/>
+                </a:lnTo>
+                <a:lnTo>
+                  <a:pt x="888682" y="682555"/>
+                </a:lnTo>
+                <a:lnTo>
+                  <a:pt x="899084" y="662668"/>
+                </a:lnTo>
+                <a:lnTo>
+                  <a:pt x="908434" y="642265"/>
+                </a:lnTo>
+                <a:lnTo>
+                  <a:pt x="916706" y="621403"/>
+                </a:lnTo>
+                <a:lnTo>
+                  <a:pt x="923879" y="600137"/>
+                </a:lnTo>
+                <a:lnTo>
+                  <a:pt x="929933" y="578525"/>
+                </a:lnTo>
+                <a:lnTo>
+                  <a:pt x="934850" y="556628"/>
+                </a:lnTo>
+                <a:lnTo>
+                  <a:pt x="938619" y="534503"/>
+                </a:lnTo>
+                <a:lnTo>
+                  <a:pt x="941228" y="512212"/>
+                </a:lnTo>
+                <a:lnTo>
+                  <a:pt x="942671" y="489816"/>
+                </a:lnTo>
+                <a:lnTo>
+                  <a:pt x="942943" y="467374"/>
+                </a:lnTo>
+                <a:lnTo>
+                  <a:pt x="942044" y="444949"/>
+                </a:lnTo>
+                <a:lnTo>
+                  <a:pt x="939976" y="422602"/>
+                </a:lnTo>
+                <a:lnTo>
+                  <a:pt x="936745" y="400392"/>
+                </a:lnTo>
+                <a:lnTo>
+                  <a:pt x="932360" y="378382"/>
+                </a:lnTo>
+                <a:lnTo>
+                  <a:pt x="926833" y="356630"/>
+                </a:lnTo>
+                <a:lnTo>
+                  <a:pt x="920178" y="335196"/>
+                </a:lnTo>
+                <a:lnTo>
+                  <a:pt x="912414" y="314139"/>
+                </a:lnTo>
+                <a:lnTo>
+                  <a:pt x="903562" y="293515"/>
+                </a:lnTo>
+                <a:lnTo>
+                  <a:pt x="893645" y="273382"/>
+                </a:lnTo>
+                <a:lnTo>
+                  <a:pt x="882693" y="253793"/>
+                </a:lnTo>
+                <a:lnTo>
+                  <a:pt x="870732" y="234802"/>
+                </a:lnTo>
+                <a:lnTo>
+                  <a:pt x="857798" y="216461"/>
+                </a:lnTo>
+                <a:lnTo>
+                  <a:pt x="843924" y="198820"/>
                 </a:lnTo>
                 <a:close/>
               </a:path>
@@ -19754,8 +19760,8 @@
         </p:nvSpPr>
         <p:spPr>
           <a:xfrm>
-            <a:off x="1982487" y="4722212"/>
-            <a:ext cx="733808" cy="1300468"/>
+            <a:off x="1982385" y="4722212"/>
+            <a:ext cx="733910" cy="1258401"/>
           </a:xfrm>
           <a:custGeom>
             <a:avLst/>
@@ -19764,288 +19770,282 @@
             <a:cxnLst/>
             <a:rect r="r" b="b" t="t" l="l"/>
             <a:pathLst>
-              <a:path h="1300468" w="733808">
+              <a:path h="1258401" w="733910">
                 <a:moveTo>
-                  <a:pt x="254446" y="1300468"/>
+                  <a:pt x="210083" y="1258402"/>
                 </a:moveTo>
                 <a:lnTo>
-                  <a:pt x="225858" y="1274230"/>
-                </a:lnTo>
-                <a:lnTo>
-                  <a:pt x="198682" y="1246532"/>
-                </a:lnTo>
-                <a:lnTo>
-                  <a:pt x="172993" y="1217451"/>
-                </a:lnTo>
-                <a:lnTo>
-                  <a:pt x="148860" y="1187065"/>
-                </a:lnTo>
-                <a:lnTo>
-                  <a:pt x="126350" y="1155459"/>
-                </a:lnTo>
-                <a:lnTo>
-                  <a:pt x="105524" y="1122718"/>
-                </a:lnTo>
-                <a:lnTo>
-                  <a:pt x="86440" y="1088932"/>
-                </a:lnTo>
-                <a:lnTo>
-                  <a:pt x="69150" y="1054194"/>
-                </a:lnTo>
-                <a:lnTo>
-                  <a:pt x="53701" y="1018599"/>
-                </a:lnTo>
-                <a:lnTo>
-                  <a:pt x="40135" y="982244"/>
-                </a:lnTo>
-                <a:lnTo>
-                  <a:pt x="28490" y="945230"/>
-                </a:lnTo>
-                <a:lnTo>
-                  <a:pt x="18797" y="907657"/>
-                </a:lnTo>
-                <a:lnTo>
-                  <a:pt x="11083" y="869628"/>
-                </a:lnTo>
-                <a:lnTo>
-                  <a:pt x="5370" y="831248"/>
-                </a:lnTo>
-                <a:lnTo>
-                  <a:pt x="1672" y="792621"/>
-                </a:lnTo>
-                <a:lnTo>
-                  <a:pt x="0" y="753854"/>
-                </a:lnTo>
-                <a:lnTo>
-                  <a:pt x="359" y="715053"/>
-                </a:lnTo>
-                <a:lnTo>
-                  <a:pt x="2748" y="676323"/>
-                </a:lnTo>
-                <a:lnTo>
-                  <a:pt x="7159" y="637772"/>
-                </a:lnTo>
-                <a:lnTo>
-                  <a:pt x="13581" y="599504"/>
-                </a:lnTo>
-                <a:lnTo>
-                  <a:pt x="21997" y="561624"/>
-                </a:lnTo>
-                <a:lnTo>
-                  <a:pt x="32382" y="524237"/>
-                </a:lnTo>
-                <a:lnTo>
-                  <a:pt x="44710" y="487444"/>
-                </a:lnTo>
-                <a:lnTo>
-                  <a:pt x="58946" y="451347"/>
-                </a:lnTo>
-                <a:lnTo>
-                  <a:pt x="75050" y="416043"/>
-                </a:lnTo>
-                <a:lnTo>
-                  <a:pt x="92980" y="381631"/>
-                </a:lnTo>
-                <a:lnTo>
-                  <a:pt x="112686" y="348204"/>
-                </a:lnTo>
-                <a:lnTo>
-                  <a:pt x="134113" y="315854"/>
-                </a:lnTo>
-                <a:lnTo>
-                  <a:pt x="157204" y="284668"/>
-                </a:lnTo>
-                <a:lnTo>
-                  <a:pt x="181894" y="254734"/>
-                </a:lnTo>
-                <a:lnTo>
-                  <a:pt x="208117" y="226133"/>
-                </a:lnTo>
-                <a:lnTo>
-                  <a:pt x="235800" y="198942"/>
-                </a:lnTo>
-                <a:lnTo>
-                  <a:pt x="264868" y="173238"/>
-                </a:lnTo>
-                <a:lnTo>
-                  <a:pt x="295241" y="149089"/>
-                </a:lnTo>
-                <a:lnTo>
-                  <a:pt x="326836" y="126562"/>
-                </a:lnTo>
-                <a:lnTo>
-                  <a:pt x="359566" y="105719"/>
-                </a:lnTo>
-                <a:lnTo>
-                  <a:pt x="393342" y="86617"/>
-                </a:lnTo>
-                <a:lnTo>
-                  <a:pt x="428071" y="69309"/>
-                </a:lnTo>
-                <a:lnTo>
-                  <a:pt x="463657" y="53841"/>
-                </a:lnTo>
-                <a:lnTo>
-                  <a:pt x="500005" y="40256"/>
-                </a:lnTo>
-                <a:lnTo>
-                  <a:pt x="537013" y="28591"/>
-                </a:lnTo>
-                <a:lnTo>
-                  <a:pt x="574581" y="18878"/>
-                </a:lnTo>
-                <a:lnTo>
-                  <a:pt x="612606" y="11145"/>
-                </a:lnTo>
-                <a:lnTo>
-                  <a:pt x="650983" y="5411"/>
-                </a:lnTo>
-                <a:lnTo>
-                  <a:pt x="689607" y="1693"/>
-                </a:lnTo>
-                <a:lnTo>
-                  <a:pt x="728373" y="0"/>
-                </a:lnTo>
-                <a:lnTo>
-                  <a:pt x="733808" y="311349"/>
-                </a:lnTo>
-                <a:lnTo>
-                  <a:pt x="711324" y="312330"/>
-                </a:lnTo>
-                <a:lnTo>
-                  <a:pt x="688921" y="314487"/>
-                </a:lnTo>
-                <a:lnTo>
-                  <a:pt x="666663" y="317812"/>
-                </a:lnTo>
-                <a:lnTo>
-                  <a:pt x="644608" y="322298"/>
-                </a:lnTo>
-                <a:lnTo>
-                  <a:pt x="622819" y="327931"/>
-                </a:lnTo>
-                <a:lnTo>
-                  <a:pt x="601354" y="334697"/>
-                </a:lnTo>
-                <a:lnTo>
-                  <a:pt x="580273" y="342576"/>
-                </a:lnTo>
-                <a:lnTo>
-                  <a:pt x="559632" y="351548"/>
-                </a:lnTo>
-                <a:lnTo>
-                  <a:pt x="539490" y="361587"/>
-                </a:lnTo>
-                <a:lnTo>
-                  <a:pt x="519900" y="372666"/>
-                </a:lnTo>
-                <a:lnTo>
-                  <a:pt x="500916" y="384755"/>
-                </a:lnTo>
-                <a:lnTo>
-                  <a:pt x="482591" y="397820"/>
-                </a:lnTo>
-                <a:lnTo>
-                  <a:pt x="464975" y="411826"/>
-                </a:lnTo>
-                <a:lnTo>
-                  <a:pt x="448116" y="426735"/>
-                </a:lnTo>
-                <a:lnTo>
-                  <a:pt x="432059" y="442506"/>
-                </a:lnTo>
-                <a:lnTo>
-                  <a:pt x="416850" y="459094"/>
-                </a:lnTo>
-                <a:lnTo>
-                  <a:pt x="402530" y="476456"/>
-                </a:lnTo>
-                <a:lnTo>
-                  <a:pt x="389137" y="494544"/>
-                </a:lnTo>
-                <a:lnTo>
-                  <a:pt x="376709" y="513307"/>
-                </a:lnTo>
-                <a:lnTo>
-                  <a:pt x="365280" y="532695"/>
-                </a:lnTo>
-                <a:lnTo>
-                  <a:pt x="354881" y="552654"/>
-                </a:lnTo>
-                <a:lnTo>
-                  <a:pt x="345540" y="573130"/>
-                </a:lnTo>
-                <a:lnTo>
-                  <a:pt x="337283" y="594066"/>
-                </a:lnTo>
-                <a:lnTo>
-                  <a:pt x="330133" y="615406"/>
-                </a:lnTo>
-                <a:lnTo>
-                  <a:pt x="324109" y="637091"/>
-                </a:lnTo>
-                <a:lnTo>
-                  <a:pt x="319228" y="659061"/>
-                </a:lnTo>
-                <a:lnTo>
-                  <a:pt x="315504" y="681256"/>
-                </a:lnTo>
-                <a:lnTo>
-                  <a:pt x="312945" y="703616"/>
-                </a:lnTo>
-                <a:lnTo>
-                  <a:pt x="311560" y="726079"/>
-                </a:lnTo>
-                <a:lnTo>
-                  <a:pt x="311352" y="748584"/>
-                </a:lnTo>
-                <a:lnTo>
-                  <a:pt x="312321" y="771069"/>
-                </a:lnTo>
-                <a:lnTo>
-                  <a:pt x="314466" y="793472"/>
-                </a:lnTo>
-                <a:lnTo>
-                  <a:pt x="317780" y="815733"/>
-                </a:lnTo>
-                <a:lnTo>
-                  <a:pt x="322254" y="837790"/>
-                </a:lnTo>
-                <a:lnTo>
-                  <a:pt x="327876" y="859582"/>
-                </a:lnTo>
-                <a:lnTo>
-                  <a:pt x="334630" y="881050"/>
-                </a:lnTo>
-                <a:lnTo>
-                  <a:pt x="342498" y="902136"/>
-                </a:lnTo>
-                <a:lnTo>
-                  <a:pt x="351458" y="922781"/>
-                </a:lnTo>
-                <a:lnTo>
-                  <a:pt x="361487" y="942929"/>
-                </a:lnTo>
-                <a:lnTo>
-                  <a:pt x="372556" y="962525"/>
-                </a:lnTo>
-                <a:lnTo>
-                  <a:pt x="384634" y="981515"/>
-                </a:lnTo>
-                <a:lnTo>
-                  <a:pt x="397690" y="999847"/>
-                </a:lnTo>
-                <a:lnTo>
-                  <a:pt x="411687" y="1017470"/>
-                </a:lnTo>
-                <a:lnTo>
-                  <a:pt x="426587" y="1034337"/>
-                </a:lnTo>
-                <a:lnTo>
-                  <a:pt x="442349" y="1050402"/>
-                </a:lnTo>
-                <a:lnTo>
-                  <a:pt x="458930" y="1065620"/>
+                  <a:pt x="184085" y="1230270"/>
+                </a:lnTo>
+                <a:lnTo>
+                  <a:pt x="159575" y="1200833"/>
+                </a:lnTo>
+                <a:lnTo>
+                  <a:pt x="136619" y="1170169"/>
+                </a:lnTo>
+                <a:lnTo>
+                  <a:pt x="115276" y="1138360"/>
+                </a:lnTo>
+                <a:lnTo>
+                  <a:pt x="95605" y="1105492"/>
+                </a:lnTo>
+                <a:lnTo>
+                  <a:pt x="77658" y="1071652"/>
+                </a:lnTo>
+                <a:lnTo>
+                  <a:pt x="61482" y="1036930"/>
+                </a:lnTo>
+                <a:lnTo>
+                  <a:pt x="47122" y="1001418"/>
+                </a:lnTo>
+                <a:lnTo>
+                  <a:pt x="34614" y="965213"/>
+                </a:lnTo>
+                <a:lnTo>
+                  <a:pt x="23993" y="928410"/>
+                </a:lnTo>
+                <a:lnTo>
+                  <a:pt x="15287" y="891107"/>
+                </a:lnTo>
+                <a:lnTo>
+                  <a:pt x="8520" y="853405"/>
+                </a:lnTo>
+                <a:lnTo>
+                  <a:pt x="3708" y="815403"/>
+                </a:lnTo>
+                <a:lnTo>
+                  <a:pt x="866" y="777204"/>
+                </a:lnTo>
+                <a:lnTo>
+                  <a:pt x="0" y="738908"/>
+                </a:lnTo>
+                <a:lnTo>
+                  <a:pt x="1113" y="700619"/>
+                </a:lnTo>
+                <a:lnTo>
+                  <a:pt x="4203" y="662439"/>
+                </a:lnTo>
+                <a:lnTo>
+                  <a:pt x="9260" y="624469"/>
+                </a:lnTo>
+                <a:lnTo>
+                  <a:pt x="16272" y="586811"/>
+                </a:lnTo>
+                <a:lnTo>
+                  <a:pt x="25219" y="549566"/>
+                </a:lnTo>
+                <a:lnTo>
+                  <a:pt x="36077" y="512832"/>
+                </a:lnTo>
+                <a:lnTo>
+                  <a:pt x="48819" y="476708"/>
+                </a:lnTo>
+                <a:lnTo>
+                  <a:pt x="63409" y="441291"/>
+                </a:lnTo>
+                <a:lnTo>
+                  <a:pt x="79809" y="406674"/>
+                </a:lnTo>
+                <a:lnTo>
+                  <a:pt x="97974" y="372950"/>
+                </a:lnTo>
+                <a:lnTo>
+                  <a:pt x="117858" y="340210"/>
+                </a:lnTo>
+                <a:lnTo>
+                  <a:pt x="139406" y="308540"/>
+                </a:lnTo>
+                <a:lnTo>
+                  <a:pt x="162560" y="278026"/>
+                </a:lnTo>
+                <a:lnTo>
+                  <a:pt x="187260" y="248748"/>
+                </a:lnTo>
+                <a:lnTo>
+                  <a:pt x="213439" y="220784"/>
+                </a:lnTo>
+                <a:lnTo>
+                  <a:pt x="241027" y="194211"/>
+                </a:lnTo>
+                <a:lnTo>
+                  <a:pt x="269951" y="169097"/>
+                </a:lnTo>
+                <a:lnTo>
+                  <a:pt x="300133" y="145511"/>
+                </a:lnTo>
+                <a:lnTo>
+                  <a:pt x="331493" y="123515"/>
+                </a:lnTo>
+                <a:lnTo>
+                  <a:pt x="363948" y="103168"/>
+                </a:lnTo>
+                <a:lnTo>
+                  <a:pt x="397410" y="84525"/>
+                </a:lnTo>
+                <a:lnTo>
+                  <a:pt x="431790" y="67634"/>
+                </a:lnTo>
+                <a:lnTo>
+                  <a:pt x="466996" y="52542"/>
+                </a:lnTo>
+                <a:lnTo>
+                  <a:pt x="502935" y="39288"/>
+                </a:lnTo>
+                <a:lnTo>
+                  <a:pt x="539511" y="27908"/>
+                </a:lnTo>
+                <a:lnTo>
+                  <a:pt x="576625" y="18433"/>
+                </a:lnTo>
+                <a:lnTo>
+                  <a:pt x="614180" y="10887"/>
+                </a:lnTo>
+                <a:lnTo>
+                  <a:pt x="652074" y="5290"/>
+                </a:lnTo>
+                <a:lnTo>
+                  <a:pt x="690206" y="1658"/>
+                </a:lnTo>
+                <a:lnTo>
+                  <a:pt x="728475" y="0"/>
+                </a:lnTo>
+                <a:lnTo>
+                  <a:pt x="733910" y="311349"/>
+                </a:lnTo>
+                <a:lnTo>
+                  <a:pt x="711714" y="312310"/>
+                </a:lnTo>
+                <a:lnTo>
+                  <a:pt x="689597" y="314417"/>
+                </a:lnTo>
+                <a:lnTo>
+                  <a:pt x="667619" y="317663"/>
+                </a:lnTo>
+                <a:lnTo>
+                  <a:pt x="645837" y="322040"/>
+                </a:lnTo>
+                <a:lnTo>
+                  <a:pt x="624311" y="327536"/>
+                </a:lnTo>
+                <a:lnTo>
+                  <a:pt x="603097" y="334136"/>
+                </a:lnTo>
+                <a:lnTo>
+                  <a:pt x="582252" y="341823"/>
+                </a:lnTo>
+                <a:lnTo>
+                  <a:pt x="561832" y="350577"/>
+                </a:lnTo>
+                <a:lnTo>
+                  <a:pt x="541892" y="360373"/>
+                </a:lnTo>
+                <a:lnTo>
+                  <a:pt x="522484" y="371186"/>
+                </a:lnTo>
+                <a:lnTo>
+                  <a:pt x="503660" y="382987"/>
+                </a:lnTo>
+                <a:lnTo>
+                  <a:pt x="485472" y="395745"/>
+                </a:lnTo>
+                <a:lnTo>
+                  <a:pt x="467966" y="409425"/>
+                </a:lnTo>
+                <a:lnTo>
+                  <a:pt x="451190" y="423991"/>
+                </a:lnTo>
+                <a:lnTo>
+                  <a:pt x="435189" y="439404"/>
+                </a:lnTo>
+                <a:lnTo>
+                  <a:pt x="420005" y="455622"/>
+                </a:lnTo>
+                <a:lnTo>
+                  <a:pt x="405679" y="472604"/>
+                </a:lnTo>
+                <a:lnTo>
+                  <a:pt x="392250" y="490302"/>
+                </a:lnTo>
+                <a:lnTo>
+                  <a:pt x="379752" y="508670"/>
+                </a:lnTo>
+                <a:lnTo>
+                  <a:pt x="368220" y="527660"/>
+                </a:lnTo>
+                <a:lnTo>
+                  <a:pt x="357683" y="547220"/>
+                </a:lnTo>
+                <a:lnTo>
+                  <a:pt x="348171" y="567297"/>
+                </a:lnTo>
+                <a:lnTo>
+                  <a:pt x="339709" y="587839"/>
+                </a:lnTo>
+                <a:lnTo>
+                  <a:pt x="332319" y="608791"/>
+                </a:lnTo>
+                <a:lnTo>
+                  <a:pt x="326021" y="630097"/>
+                </a:lnTo>
+                <a:lnTo>
+                  <a:pt x="320832" y="651699"/>
+                </a:lnTo>
+                <a:lnTo>
+                  <a:pt x="316765" y="673541"/>
+                </a:lnTo>
+                <a:lnTo>
+                  <a:pt x="313832" y="695563"/>
+                </a:lnTo>
+                <a:lnTo>
+                  <a:pt x="312040" y="717708"/>
+                </a:lnTo>
+                <a:lnTo>
+                  <a:pt x="311394" y="739915"/>
+                </a:lnTo>
+                <a:lnTo>
+                  <a:pt x="311896" y="762127"/>
+                </a:lnTo>
+                <a:lnTo>
+                  <a:pt x="313545" y="784282"/>
+                </a:lnTo>
+                <a:lnTo>
+                  <a:pt x="316336" y="806323"/>
+                </a:lnTo>
+                <a:lnTo>
+                  <a:pt x="320261" y="828191"/>
+                </a:lnTo>
+                <a:lnTo>
+                  <a:pt x="325310" y="849826"/>
+                </a:lnTo>
+                <a:lnTo>
+                  <a:pt x="331470" y="871172"/>
+                </a:lnTo>
+                <a:lnTo>
+                  <a:pt x="338725" y="892171"/>
+                </a:lnTo>
+                <a:lnTo>
+                  <a:pt x="347054" y="912768"/>
+                </a:lnTo>
+                <a:lnTo>
+                  <a:pt x="356436" y="932907"/>
+                </a:lnTo>
+                <a:lnTo>
+                  <a:pt x="366845" y="952534"/>
+                </a:lnTo>
+                <a:lnTo>
+                  <a:pt x="378255" y="971598"/>
+                </a:lnTo>
+                <a:lnTo>
+                  <a:pt x="390633" y="990047"/>
+                </a:lnTo>
+                <a:lnTo>
+                  <a:pt x="403948" y="1007832"/>
+                </a:lnTo>
+                <a:lnTo>
+                  <a:pt x="418164" y="1024905"/>
+                </a:lnTo>
+                <a:lnTo>
+                  <a:pt x="433242" y="1041222"/>
                 </a:lnTo>
                 <a:close/>
               </a:path>
@@ -20069,7 +20069,7 @@
         </p:nvSpPr>
         <p:spPr>
           <a:xfrm>
-            <a:off x="2835821" y="4645035"/>
+            <a:off x="2881239" y="4664243"/>
             <a:ext cx="364236" cy="119380"/>
           </a:xfrm>
           <a:prstGeom prst="roundRect">
@@ -20093,7 +20093,7 @@
         </p:nvSpPr>
         <p:spPr>
           <a:xfrm>
-            <a:off x="2873921" y="4638708"/>
+            <a:off x="2919339" y="4657916"/>
             <a:ext cx="289306" cy="93980"/>
           </a:xfrm>
           <a:prstGeom prst="rect">
@@ -20125,7 +20125,7 @@
                 </a:solidFill>
                 <a:latin typeface="Arial"/>
               </a:rPr>
-              <a:t>11.8%</a:t>
+              <a:t>13.7%</a:t>
             </a:r>
             <a:endParaRPr lang="en-US" sz="1100"/>
           </a:p>
@@ -20139,7 +20139,7 @@
         </p:nvSpPr>
         <p:spPr>
           <a:xfrm>
-            <a:off x="3153896" y="5939999"/>
+            <a:off x="3096182" y="5999491"/>
             <a:ext cx="364236" cy="119380"/>
           </a:xfrm>
           <a:prstGeom prst="roundRect">
@@ -20163,7 +20163,7 @@
         </p:nvSpPr>
         <p:spPr>
           <a:xfrm>
-            <a:off x="3191996" y="5933672"/>
+            <a:off x="3134282" y="5993165"/>
             <a:ext cx="289306" cy="93980"/>
           </a:xfrm>
           <a:prstGeom prst="rect">
@@ -20195,7 +20195,7 @@
                 </a:solidFill>
                 <a:latin typeface="Arial"/>
               </a:rPr>
-              <a:t>49.4%</a:t>
+              <a:t>48.7%</a:t>
             </a:r>
             <a:endParaRPr lang="en-US" sz="1100"/>
           </a:p>
@@ -20209,7 +20209,7 @@
         </p:nvSpPr>
         <p:spPr>
           <a:xfrm>
-            <a:off x="1777065" y="5125180"/>
+            <a:off x="1789219" y="5093854"/>
             <a:ext cx="364236" cy="119380"/>
           </a:xfrm>
           <a:prstGeom prst="roundRect">
@@ -20233,7 +20233,7 @@
         </p:nvSpPr>
         <p:spPr>
           <a:xfrm>
-            <a:off x="1815165" y="5118853"/>
+            <a:off x="1827319" y="5087527"/>
             <a:ext cx="289306" cy="93980"/>
           </a:xfrm>
           <a:prstGeom prst="rect">
@@ -20265,7 +20265,7 @@
                 </a:solidFill>
                 <a:latin typeface="Arial"/>
               </a:rPr>
-              <a:t>38.9%</a:t>
+              <a:t>37.6%</a:t>
             </a:r>
             <a:endParaRPr lang="en-US" sz="1100"/>
           </a:p>
@@ -20279,8 +20279,8 @@
         </p:nvSpPr>
         <p:spPr>
           <a:xfrm>
-            <a:off x="2342997" y="5356241"/>
-            <a:ext cx="762876" cy="152718"/>
+            <a:off x="2324588" y="5356241"/>
+            <a:ext cx="799694" cy="152718"/>
           </a:xfrm>
           <a:prstGeom prst="rect">
             <a:avLst/>
@@ -20305,7 +20305,7 @@
               <a:defRPr/>
             </a:pPr>
             <a:r>
-              <a:rPr lang="en-US" sz="1300" b="false" i="false" u="none" strike="noStrike" kern="0">
+              <a:rPr lang="en-US" sz="1300" b="true" i="false" u="none" strike="noStrike" kern="0">
                 <a:solidFill>
                   <a:srgbClr val="2D2D2D"/>
                 </a:solidFill>
@@ -20693,7 +20693,7 @@
         </p:nvCxnSpPr>
         <p:spPr>
           <a:xfrm flipV="false">
-            <a:off x="5873914" y="5714891"/>
+            <a:off x="5873914" y="5834228"/>
             <a:ext cx="4437086" cy="0"/>
           </a:xfrm>
           <a:prstGeom prst="line">
@@ -20714,8 +20714,8 @@
         </p:nvSpPr>
         <p:spPr>
           <a:xfrm>
-            <a:off x="5625400" y="5658475"/>
-            <a:ext cx="198984" cy="93980"/>
+            <a:off x="5681890" y="5777812"/>
+            <a:ext cx="142494" cy="93980"/>
           </a:xfrm>
           <a:prstGeom prst="rect">
             <a:avLst/>
@@ -20746,7 +20746,7 @@
                 </a:solidFill>
                 <a:latin typeface="Arial"/>
               </a:rPr>
-              <a:t>10.0</a:t>
+              <a:t>5.0</a:t>
             </a:r>
             <a:endParaRPr lang="en-US" sz="1100"/>
           </a:p>
@@ -20760,7 +20760,7 @@
         </p:nvCxnSpPr>
         <p:spPr>
           <a:xfrm flipV="false">
-            <a:off x="5873914" y="5237545"/>
+            <a:off x="5873914" y="5476218"/>
             <a:ext cx="4437086" cy="0"/>
           </a:xfrm>
           <a:prstGeom prst="line">
@@ -20781,7 +20781,7 @@
         </p:nvSpPr>
         <p:spPr>
           <a:xfrm>
-            <a:off x="5625400" y="5181130"/>
+            <a:off x="5625400" y="5419802"/>
             <a:ext cx="198984" cy="93980"/>
           </a:xfrm>
           <a:prstGeom prst="rect">
@@ -20813,7 +20813,7 @@
                 </a:solidFill>
                 <a:latin typeface="Arial"/>
               </a:rPr>
-              <a:t>20.0</a:t>
+              <a:t>10.0</a:t>
             </a:r>
             <a:endParaRPr lang="en-US" sz="1100"/>
           </a:p>
@@ -20827,7 +20827,7 @@
         </p:nvCxnSpPr>
         <p:spPr>
           <a:xfrm flipV="false">
-            <a:off x="5873914" y="4760200"/>
+            <a:off x="5873914" y="5118209"/>
             <a:ext cx="4437086" cy="0"/>
           </a:xfrm>
           <a:prstGeom prst="line">
@@ -20848,7 +20848,7 @@
         </p:nvSpPr>
         <p:spPr>
           <a:xfrm>
-            <a:off x="5625400" y="4703784"/>
+            <a:off x="5625400" y="5061793"/>
             <a:ext cx="198984" cy="93980"/>
           </a:xfrm>
           <a:prstGeom prst="rect">
@@ -20880,22 +20880,89 @@
                 </a:solidFill>
                 <a:latin typeface="Arial"/>
               </a:rPr>
-              <a:t>30.0</a:t>
+              <a:t>15.0</a:t>
             </a:r>
             <a:endParaRPr lang="en-US" sz="1100"/>
           </a:p>
         </p:txBody>
       </p:sp>
-      <p:sp>
-        <p:nvSpPr>
-          <p:cNvPr name="AutoShape 99" id="99"/>
+      <p:cxnSp>
+        <p:nvCxnSpPr>
+          <p:cNvPr name="Connector 99" id="99"/>
+          <p:cNvCxnSpPr/>
+          <p:nvPr/>
+        </p:nvCxnSpPr>
+        <p:spPr>
+          <a:xfrm flipV="false">
+            <a:off x="5873914" y="4760200"/>
+            <a:ext cx="4437086" cy="0"/>
+          </a:xfrm>
+          <a:prstGeom prst="line">
+            <a:avLst/>
+          </a:prstGeom>
+          <a:ln w="6350" cap="flat">
+            <a:solidFill>
+              <a:srgbClr val="E0E0E0"/>
+            </a:solidFill>
+          </a:ln>
+        </p:spPr>
+      </p:cxnSp>
+      <p:sp>
+        <p:nvSpPr>
+          <p:cNvPr name="GraphCompose Text Line" id="100"/>
+          <p:cNvSpPr txBox="true"/>
+          <p:nvPr/>
+        </p:nvSpPr>
+        <p:spPr>
+          <a:xfrm>
+            <a:off x="5625400" y="4703784"/>
+            <a:ext cx="198984" cy="93980"/>
+          </a:xfrm>
+          <a:prstGeom prst="rect">
+            <a:avLst/>
+          </a:prstGeom>
+        </p:spPr>
+        <p:txBody>
+          <a:bodyPr anchor="t" rtlCol="false" wrap="none" tIns="0" rIns="0" bIns="0" lIns="0">
+            <a:noAutofit/>
+          </a:bodyPr>
+          <a:lstStyle/>
+          <a:p>
+            <a:pPr algn="l">
+              <a:lnSpc>
+                <a:spcPct val="100000"/>
+              </a:lnSpc>
+              <a:spcBef>
+                <a:spcPct val="0"/>
+              </a:spcBef>
+              <a:spcAft>
+                <a:spcPct val="0"/>
+              </a:spcAft>
+              <a:defRPr/>
+            </a:pPr>
+            <a:r>
+              <a:rPr lang="en-US" sz="800" b="false" i="false" u="none" strike="noStrike" kern="0">
+                <a:solidFill>
+                  <a:srgbClr val="5A5A5A"/>
+                </a:solidFill>
+                <a:latin typeface="Arial"/>
+              </a:rPr>
+              <a:t>20.0</a:t>
+            </a:r>
+            <a:endParaRPr lang="en-US" sz="1100"/>
+          </a:p>
+        </p:txBody>
+      </p:sp>
+      <p:sp>
+        <p:nvSpPr>
+          <p:cNvPr name="AutoShape 101" id="101"/>
           <p:cNvSpPr/>
           <p:nvPr/>
         </p:nvSpPr>
         <p:spPr>
           <a:xfrm>
-            <a:off x="6569649" y="5137795"/>
-            <a:ext cx="915815" cy="1054442"/>
+            <a:off x="6569649" y="5074854"/>
+            <a:ext cx="915815" cy="1117383"/>
           </a:xfrm>
           <a:prstGeom prst="roundRect">
             <a:avLst>
@@ -20912,13 +20979,13 @@
       </p:sp>
       <p:sp>
         <p:nvSpPr>
-          <p:cNvPr name="GraphCompose Text Line" id="100"/>
+          <p:cNvPr name="GraphCompose Text Line" id="102"/>
           <p:cNvSpPr txBox="true"/>
           <p:nvPr/>
         </p:nvSpPr>
         <p:spPr>
           <a:xfrm>
-            <a:off x="6928699" y="4999388"/>
+            <a:off x="6928699" y="4936447"/>
             <a:ext cx="198984" cy="93980"/>
           </a:xfrm>
           <a:prstGeom prst="rect">
@@ -20950,7 +21017,7 @@
                 </a:solidFill>
                 <a:latin typeface="Arial"/>
               </a:rPr>
-              <a:t>22.1</a:t>
+              <a:t>15.6</a:t>
             </a:r>
             <a:endParaRPr lang="en-US" sz="1100"/>
           </a:p>
@@ -20958,18 +21025,18 @@
       </p:sp>
       <p:sp>
         <p:nvSpPr>
-          <p:cNvPr name="AutoShape 101" id="101"/>
+          <p:cNvPr name="AutoShape 103" id="103"/>
           <p:cNvSpPr/>
           <p:nvPr/>
         </p:nvSpPr>
         <p:spPr>
           <a:xfrm>
-            <a:off x="7634550" y="5996331"/>
-            <a:ext cx="915815" cy="195907"/>
+            <a:off x="7634550" y="5946208"/>
+            <a:ext cx="915815" cy="246029"/>
           </a:xfrm>
           <a:prstGeom prst="roundRect">
             <a:avLst>
-              <a:gd name="adj" fmla="val 12965"/>
+              <a:gd name="adj" fmla="val 10324"/>
             </a:avLst>
           </a:prstGeom>
           <a:solidFill>
@@ -20982,13 +21049,13 @@
       </p:sp>
       <p:sp>
         <p:nvSpPr>
-          <p:cNvPr name="GraphCompose Text Line" id="102"/>
+          <p:cNvPr name="GraphCompose Text Line" id="104"/>
           <p:cNvSpPr txBox="true"/>
           <p:nvPr/>
         </p:nvSpPr>
         <p:spPr>
           <a:xfrm>
-            <a:off x="8021845" y="5857924"/>
+            <a:off x="8021845" y="5807801"/>
             <a:ext cx="142494" cy="93980"/>
           </a:xfrm>
           <a:prstGeom prst="rect">
@@ -21020,7 +21087,7 @@
                 </a:solidFill>
                 <a:latin typeface="Arial"/>
               </a:rPr>
-              <a:t>4.1</a:t>
+              <a:t>3.4</a:t>
             </a:r>
             <a:endParaRPr lang="en-US" sz="1100"/>
           </a:p>
@@ -21028,14 +21095,14 @@
       </p:sp>
       <p:sp>
         <p:nvSpPr>
-          <p:cNvPr name="AutoShape 103" id="103"/>
+          <p:cNvPr name="AutoShape 105" id="105"/>
           <p:cNvSpPr/>
           <p:nvPr/>
         </p:nvSpPr>
         <p:spPr>
           <a:xfrm>
-            <a:off x="8699450" y="5207410"/>
-            <a:ext cx="915815" cy="984827"/>
+            <a:off x="8699450" y="5086758"/>
+            <a:ext cx="915815" cy="1105479"/>
           </a:xfrm>
           <a:prstGeom prst="roundRect">
             <a:avLst>
@@ -21052,13 +21119,13 @@
       </p:sp>
       <p:sp>
         <p:nvSpPr>
-          <p:cNvPr name="GraphCompose Text Line" id="104"/>
+          <p:cNvPr name="GraphCompose Text Line" id="106"/>
           <p:cNvSpPr txBox="true"/>
           <p:nvPr/>
         </p:nvSpPr>
         <p:spPr>
           <a:xfrm>
-            <a:off x="9058501" y="5069003"/>
+            <a:off x="9058501" y="4948351"/>
             <a:ext cx="198984" cy="93980"/>
           </a:xfrm>
           <a:prstGeom prst="rect">
@@ -21090,7 +21157,7 @@
                 </a:solidFill>
                 <a:latin typeface="Arial"/>
               </a:rPr>
-              <a:t>20.6</a:t>
+              <a:t>15.4</a:t>
             </a:r>
             <a:endParaRPr lang="en-US" sz="1100"/>
           </a:p>
@@ -21098,7 +21165,7 @@
       </p:sp>
       <p:sp>
         <p:nvSpPr>
-          <p:cNvPr name="GraphCompose Text Line" id="105"/>
+          <p:cNvPr name="GraphCompose Text Line" id="107"/>
           <p:cNvSpPr txBox="true"/>
           <p:nvPr/>
         </p:nvSpPr>
@@ -21144,7 +21211,7 @@
       </p:sp>
       <p:sp>
         <p:nvSpPr>
-          <p:cNvPr name="AutoShape 106" id="106"/>
+          <p:cNvPr name="AutoShape 108" id="108"/>
           <p:cNvSpPr/>
           <p:nvPr/>
         </p:nvSpPr>
@@ -21168,7 +21235,7 @@
       </p:sp>
       <p:sp>
         <p:nvSpPr>
-          <p:cNvPr name="GraphCompose Text Line" id="107"/>
+          <p:cNvPr name="GraphCompose Text Line" id="109"/>
           <p:cNvSpPr txBox="true"/>
           <p:nvPr/>
         </p:nvSpPr>
@@ -21214,7 +21281,7 @@
       </p:sp>
       <p:sp>
         <p:nvSpPr>
-          <p:cNvPr name="AutoShape 108" id="108"/>
+          <p:cNvPr name="AutoShape 110" id="110"/>
           <p:cNvSpPr/>
           <p:nvPr/>
         </p:nvSpPr>
@@ -21238,7 +21305,7 @@
       </p:sp>
       <p:sp>
         <p:nvSpPr>
-          <p:cNvPr name="GraphCompose Text Line" id="109"/>
+          <p:cNvPr name="GraphCompose Text Line" id="111"/>
           <p:cNvSpPr txBox="true"/>
           <p:nvPr/>
         </p:nvSpPr>
@@ -21284,7 +21351,7 @@
       </p:sp>
       <p:sp>
         <p:nvSpPr>
-          <p:cNvPr name="AutoShape 110" id="110"/>
+          <p:cNvPr name="AutoShape 112" id="112"/>
           <p:cNvSpPr/>
           <p:nvPr/>
         </p:nvSpPr>
@@ -21308,7 +21375,7 @@
       </p:sp>
       <p:sp>
         <p:nvSpPr>
-          <p:cNvPr name="GraphCompose Text Line" id="111"/>
+          <p:cNvPr name="GraphCompose Text Line" id="113"/>
           <p:cNvSpPr txBox="true"/>
           <p:nvPr/>
         </p:nvSpPr>
@@ -21354,14 +21421,14 @@
       </p:sp>
       <p:sp>
         <p:nvSpPr>
-          <p:cNvPr name="GraphCompose Footer" id="112"/>
+          <p:cNvPr name="GraphCompose Footer" id="114"/>
           <p:cNvSpPr txBox="true"/>
           <p:nvPr/>
         </p:nvSpPr>
         <p:spPr>
           <a:xfrm>
             <a:off x="203200" y="7189226"/>
-            <a:ext cx="2250948" cy="140335"/>
+            <a:ext cx="1621168" cy="140335"/>
           </a:xfrm>
           <a:prstGeom prst="rect">
             <a:avLst/>
@@ -21383,7 +21450,7 @@
                 </a:solidFill>
                 <a:latin typeface="Arial"/>
               </a:rPr>
-              <a:t>GraphCompose · v2.1.0-SNAPSHOT “twinned”</a:t>
+              <a:t>GraphCompose · v2.1.1 “twinned”</a:t>
             </a:r>
             <a:endParaRPr lang="en-US" sz="1100"/>
           </a:p>
@@ -21391,7 +21458,7 @@
       </p:sp>
       <p:sp>
         <p:nvSpPr>
-          <p:cNvPr name="GraphCompose Footer" id="113"/>
+          <p:cNvPr name="GraphCompose Footer" id="115"/>
           <p:cNvSpPr txBox="true"/>
           <p:nvPr/>
         </p:nvSpPr>
@@ -21428,7 +21495,7 @@
       </p:sp>
       <p:cxnSp>
         <p:nvCxnSpPr>
-          <p:cNvPr name="GraphCompose Footer Separator" id="114"/>
+          <p:cNvPr name="GraphCompose Footer Separator" id="116"/>
           <p:cNvCxnSpPr/>
           <p:nvPr/>
         </p:nvCxnSpPr>
